--- a/public/fun/pack/pptx/talk/발표템플릿_29_모임·동호회소개_억새밭.pptx
+++ b/public/fun/pack/pptx/talk/발표템플릿_29_모임·동호회소개_억새밭.pptx
@@ -3286,6 +3286,14 @@
 <file path=ppt/slides/slide1.xml><?xml version="1.0" encoding="utf-8"?>
 <p:sld xmlns:a="http://schemas.openxmlformats.org/drawingml/2006/main" xmlns:p="http://schemas.openxmlformats.org/presentationml/2006/main" xmlns:r="http://schemas.openxmlformats.org/officeDocument/2006/relationships">
   <p:cSld>
+    <p:bg>
+      <p:bgPr>
+        <a:solidFill>
+          <a:srgbClr val="493B27"/>
+        </a:solidFill>
+        <a:effectLst/>
+      </p:bgPr>
+    </p:bg>
     <p:spTree>
       <p:nvGrpSpPr>
         <p:cNvPr id="1" name=""/>
@@ -3293,30 +3301,106 @@
         <p:nvPr/>
       </p:nvGrpSpPr>
       <p:grpSpPr/>
-      <p:pic>
-        <p:nvPicPr>
-          <p:cNvPr id="3" name="표지 그림" descr="talk-29.jpg"/>
-          <p:cNvPicPr>
-            <a:picLocks noChangeAspect="1"/>
-          </p:cNvPicPr>
+      <p:sp>
+        <p:nvSpPr>
+          <p:cNvPr id="3" name="장식"/>
+          <p:cNvSpPr/>
           <p:nvPr/>
-        </p:nvPicPr>
-        <p:blipFill>
-          <a:blip r:embed="rId2"/>
-          <a:stretch>
-            <a:fillRect/>
-          </a:stretch>
-        </p:blipFill>
-        <p:spPr>
-          <a:xfrm>
-            <a:off x="0" y="0"/>
-            <a:ext cx="12191695" cy="6858000"/>
+        </p:nvSpPr>
+        <p:spPr>
+          <a:xfrm>
+            <a:off x="1463003" y="960120"/>
+            <a:ext cx="3657508" cy="4526280"/>
+          </a:xfrm>
+          <a:prstGeom prst="roundRect">
+            <a:avLst>
+              <a:gd name="adj" fmla="val 4000"/>
+            </a:avLst>
+          </a:prstGeom>
+          <a:solidFill>
+            <a:srgbClr val="D8B279"/>
+          </a:solidFill>
+          <a:ln>
+            <a:noFill/>
+          </a:ln>
+        </p:spPr>
+        <p:txBody>
+          <a:bodyPr rtlCol="0" anchor="ctr"/>
+          <a:lstStyle/>
+          <a:p>
+            <a:pPr algn="ctr"/>
+          </a:p>
+        </p:txBody>
+      </p:sp>
+      <p:sp>
+        <p:nvSpPr>
+          <p:cNvPr id="4" name="장식"/>
+          <p:cNvSpPr/>
+          <p:nvPr/>
+        </p:nvSpPr>
+        <p:spPr>
+          <a:xfrm>
+            <a:off x="975335" y="1234439"/>
+            <a:ext cx="3657508" cy="4526280"/>
+          </a:xfrm>
+          <a:prstGeom prst="roundRect">
+            <a:avLst>
+              <a:gd name="adj" fmla="val 4000"/>
+            </a:avLst>
+          </a:prstGeom>
+          <a:noFill/>
+          <a:ln w="9525">
+            <a:solidFill>
+              <a:srgbClr val="FFFFFF"/>
+            </a:solidFill>
+          </a:ln>
+        </p:spPr>
+        <p:txBody>
+          <a:bodyPr rtlCol="0" anchor="ctr"/>
+          <a:lstStyle/>
+          <a:p>
+            <a:pPr algn="ctr"/>
+          </a:p>
+        </p:txBody>
+      </p:sp>
+      <p:sp>
+        <p:nvSpPr>
+          <p:cNvPr id="5" name="라벨"/>
+          <p:cNvSpPr txBox="1"/>
+          <p:nvPr/>
+        </p:nvSpPr>
+        <p:spPr>
+          <a:xfrm>
+            <a:off x="6827349" y="2148840"/>
+            <a:ext cx="4632844" cy="274320"/>
           </a:xfrm>
           <a:prstGeom prst="rect">
             <a:avLst/>
           </a:prstGeom>
-        </p:spPr>
-      </p:pic>
+          <a:noFill/>
+        </p:spPr>
+        <p:txBody>
+          <a:bodyPr wrap="square" lIns="54864" rIns="54864" tIns="27432" bIns="27432" anchor="t">
+            <a:noAutofit/>
+          </a:bodyPr>
+          <a:lstStyle/>
+          <a:p>
+            <a:pPr algn="l">
+              <a:lnSpc>
+                <a:spcPct val="115000"/>
+              </a:lnSpc>
+            </a:pPr>
+            <a:r>
+              <a:rPr sz="1000" b="1" i="0" spc="250">
+                <a:solidFill>
+                  <a:srgbClr val="FFFFFF"/>
+                </a:solidFill>
+              </a:rPr>
+              <a:t>PRESENTATION</a:t>
+            </a:r>
+          </a:p>
+        </p:txBody>
+      </p:sp>
       <p:sp>
         <p:nvSpPr>
           <p:cNvPr id="2" name="Title 1"/>
@@ -3329,8 +3413,8 @@
         </p:nvSpPr>
         <p:spPr>
           <a:xfrm>
-            <a:off x="853418" y="2057400"/>
-            <a:ext cx="6095847" cy="1554480"/>
+            <a:off x="6827349" y="2606040"/>
+            <a:ext cx="4632844" cy="1188720"/>
           </a:xfrm>
         </p:spPr>
         <p:txBody>
@@ -3345,9 +3429,9 @@
               </a:lnSpc>
             </a:pPr>
             <a:r>
-              <a:rPr sz="3600" b="1" i="0">
+              <a:rPr sz="4000" b="1" i="0">
                 <a:solidFill>
-                  <a:srgbClr val="59472C"/>
+                  <a:srgbClr val="FFFFFF"/>
                 </a:solidFill>
               </a:rPr>
               <a:t>발표 제목을 입력하세요</a:t>
@@ -3357,14 +3441,14 @@
       </p:sp>
       <p:sp>
         <p:nvSpPr>
-          <p:cNvPr id="4" name="한 줄 문구"/>
+          <p:cNvPr id="6" name="한 줄 문구"/>
           <p:cNvSpPr txBox="1"/>
           <p:nvPr/>
         </p:nvSpPr>
         <p:spPr>
           <a:xfrm>
-            <a:off x="853418" y="3749039"/>
-            <a:ext cx="6095847" cy="822960"/>
+            <a:off x="6827349" y="3886200"/>
+            <a:ext cx="4632844" cy="822960"/>
           </a:xfrm>
           <a:prstGeom prst="rect">
             <a:avLst/>
@@ -3383,26 +3467,26 @@
               </a:lnSpc>
             </a:pPr>
             <a:r>
-              <a:rPr sz="1700" b="0" i="1">
+              <a:rPr sz="1700" b="0" i="0">
                 <a:solidFill>
-                  <a:srgbClr val="59472C"/>
+                  <a:srgbClr val="FFFFFF"/>
                 </a:solidFill>
               </a:rPr>
-              <a:t>가을 행사 준비 상황을 공유합니다</a:t>
-            </a:r>
-          </a:p>
-        </p:txBody>
-      </p:sp>
-      <p:sp>
-        <p:nvSpPr>
-          <p:cNvPr id="5" name="안내 문구"/>
+              <a:t>행사 준비 상황을 공유합니다</a:t>
+            </a:r>
+          </a:p>
+        </p:txBody>
+      </p:sp>
+      <p:sp>
+        <p:nvSpPr>
+          <p:cNvPr id="7" name="안내 문구"/>
           <p:cNvSpPr txBox="1"/>
           <p:nvPr/>
         </p:nvSpPr>
         <p:spPr>
           <a:xfrm>
-            <a:off x="853418" y="4617720"/>
-            <a:ext cx="6095847" cy="914400"/>
+            <a:off x="6827349" y="4754880"/>
+            <a:ext cx="4632844" cy="914400"/>
           </a:xfrm>
           <a:prstGeom prst="rect">
             <a:avLst/>
@@ -3423,7 +3507,7 @@
             <a:r>
               <a:rPr sz="1400" b="0" i="0">
                 <a:solidFill>
-                  <a:srgbClr val="666666"/>
+                  <a:srgbClr val="FFFFFF"/>
                 </a:solidFill>
               </a:rPr>
               <a:t>모임·동호회 소개 · 발표자 이름</a:t>
@@ -3438,10 +3522,10 @@
             <a:r>
               <a:rPr sz="1400" b="0" i="0">
                 <a:solidFill>
-                  <a:srgbClr val="666666"/>
+                  <a:srgbClr val="FFFFFF"/>
                 </a:solidFill>
               </a:rPr>
-              <a:t>2027. 00. 00</a:t>
+              <a:t>날짜 입력</a:t>
             </a:r>
           </a:p>
         </p:txBody>
@@ -3460,7 +3544,7 @@
     <p:bg>
       <p:bgPr>
         <a:solidFill>
-          <a:srgbClr val="FFFFFF"/>
+          <a:srgbClr val="F6E9D5"/>
         </a:solidFill>
         <a:effectLst/>
       </p:bgPr>
@@ -3480,14 +3564,14 @@
         </p:nvSpPr>
         <p:spPr>
           <a:xfrm>
-            <a:off x="-182880" y="6144768"/>
-            <a:ext cx="12557455" cy="731520"/>
-          </a:xfrm>
-          <a:prstGeom prst="wave">
+            <a:off x="10180015" y="-1645920"/>
+            <a:ext cx="3474720" cy="3474720"/>
+          </a:xfrm>
+          <a:prstGeom prst="ellipse">
             <a:avLst/>
           </a:prstGeom>
           <a:solidFill>
-            <a:srgbClr val="ECE3D4"/>
+            <a:srgbClr val="EBD2AD"/>
           </a:solidFill>
           <a:ln>
             <a:noFill/>
@@ -3503,20 +3587,58 @@
       </p:sp>
       <p:sp>
         <p:nvSpPr>
-          <p:cNvPr id="4" name="장식"/>
+          <p:cNvPr id="4" name="상단 라벨"/>
+          <p:cNvSpPr txBox="1"/>
+          <p:nvPr/>
+        </p:nvSpPr>
+        <p:spPr>
+          <a:xfrm>
+            <a:off x="640080" y="274320"/>
+            <a:ext cx="5486400" cy="274320"/>
+          </a:xfrm>
+          <a:prstGeom prst="rect">
+            <a:avLst/>
+          </a:prstGeom>
+          <a:noFill/>
+        </p:spPr>
+        <p:txBody>
+          <a:bodyPr wrap="square" lIns="54864" rIns="54864" tIns="27432" bIns="27432" anchor="ctr">
+            <a:noAutofit/>
+          </a:bodyPr>
+          <a:lstStyle/>
+          <a:p>
+            <a:pPr algn="l">
+              <a:lnSpc>
+                <a:spcPct val="115000"/>
+              </a:lnSpc>
+            </a:pPr>
+            <a:r>
+              <a:rPr sz="900" b="1" i="0" spc="250">
+                <a:solidFill>
+                  <a:srgbClr val="26231F"/>
+                </a:solidFill>
+              </a:rPr>
+              <a:t>PRESENTATION</a:t>
+            </a:r>
+          </a:p>
+        </p:txBody>
+      </p:sp>
+      <p:sp>
+        <p:nvSpPr>
+          <p:cNvPr id="5" name="포인트"/>
           <p:cNvSpPr/>
           <p:nvPr/>
         </p:nvSpPr>
         <p:spPr>
-          <a:xfrm>
-            <a:off x="-182880" y="6400800"/>
-            <a:ext cx="12557455" cy="502920"/>
-          </a:xfrm>
-          <a:prstGeom prst="wave">
+          <a:xfrm rot="18900000">
+            <a:off x="11048695" y="502919"/>
+            <a:ext cx="274320" cy="274320"/>
+          </a:xfrm>
+          <a:prstGeom prst="teardrop">
             <a:avLst/>
           </a:prstGeom>
           <a:solidFill>
-            <a:srgbClr val="9D7D4D"/>
+            <a:srgbClr val="FFFFFF"/>
           </a:solidFill>
           <a:ln>
             <a:noFill/>
@@ -3542,8 +3664,8 @@
         </p:nvSpPr>
         <p:spPr>
           <a:xfrm>
-            <a:off x="640080" y="457200"/>
-            <a:ext cx="9722815" cy="868680"/>
+            <a:off x="640080" y="658368"/>
+            <a:ext cx="9082735" cy="868680"/>
           </a:xfrm>
         </p:spPr>
         <p:txBody>
@@ -3560,7 +3682,7 @@
             <a:r>
               <a:rPr sz="3000" b="1" i="0">
                 <a:solidFill>
-                  <a:srgbClr val="59472C"/>
+                  <a:srgbClr val="26231F"/>
                 </a:solidFill>
               </a:rPr>
               <a:t>목차</a:t>
@@ -3570,27 +3692,25 @@
       </p:sp>
       <p:sp>
         <p:nvSpPr>
-          <p:cNvPr id="5" name="줄 1"/>
+          <p:cNvPr id="6" name="줄 1"/>
           <p:cNvSpPr/>
           <p:nvPr/>
         </p:nvSpPr>
         <p:spPr>
           <a:xfrm>
-            <a:off x="640080" y="1554480"/>
+            <a:off x="640080" y="1783080"/>
             <a:ext cx="10911535" cy="914400"/>
           </a:xfrm>
           <a:prstGeom prst="roundRect">
             <a:avLst>
-              <a:gd name="adj" fmla="val 8000"/>
+              <a:gd name="adj" fmla="val 4000"/>
             </a:avLst>
           </a:prstGeom>
           <a:solidFill>
-            <a:srgbClr val="F8F5F1"/>
+            <a:srgbClr val="FBF5EC"/>
           </a:solidFill>
-          <a:ln w="12700">
-            <a:solidFill>
-              <a:srgbClr val="ECE3D4"/>
-            </a:solidFill>
+          <a:ln>
+            <a:noFill/>
           </a:ln>
         </p:spPr>
         <p:txBody>
@@ -3603,20 +3723,49 @@
       </p:sp>
       <p:sp>
         <p:nvSpPr>
-          <p:cNvPr id="6" name="번호 1"/>
+          <p:cNvPr id="7" name="포인트 막대"/>
           <p:cNvSpPr/>
           <p:nvPr/>
         </p:nvSpPr>
         <p:spPr>
           <a:xfrm>
-            <a:off x="822959" y="1783080"/>
+            <a:off x="640080" y="1892807"/>
+            <a:ext cx="54864" cy="694944"/>
+          </a:xfrm>
+          <a:prstGeom prst="rect">
+            <a:avLst/>
+          </a:prstGeom>
+          <a:solidFill>
+            <a:srgbClr val="D8B279"/>
+          </a:solidFill>
+          <a:ln>
+            <a:noFill/>
+          </a:ln>
+        </p:spPr>
+        <p:txBody>
+          <a:bodyPr rtlCol="0" anchor="ctr"/>
+          <a:lstStyle/>
+          <a:p>
+            <a:pPr algn="ctr"/>
+          </a:p>
+        </p:txBody>
+      </p:sp>
+      <p:sp>
+        <p:nvSpPr>
+          <p:cNvPr id="8" name="번호 1"/>
+          <p:cNvSpPr/>
+          <p:nvPr/>
+        </p:nvSpPr>
+        <p:spPr>
+          <a:xfrm>
+            <a:off x="822959" y="2011680"/>
             <a:ext cx="457200" cy="457200"/>
           </a:xfrm>
           <a:prstGeom prst="ellipse">
             <a:avLst/>
           </a:prstGeom>
           <a:solidFill>
-            <a:srgbClr val="9D7D4D"/>
+            <a:srgbClr val="DCE198"/>
           </a:solidFill>
           <a:ln>
             <a:noFill/>
@@ -3636,7 +3785,7 @@
             <a:r>
               <a:rPr sz="1600" b="1" i="0">
                 <a:solidFill>
-                  <a:srgbClr val="FFFFFF"/>
+                  <a:srgbClr val="26231F"/>
                 </a:solidFill>
               </a:rPr>
               <a:t>1</a:t>
@@ -3646,13 +3795,13 @@
       </p:sp>
       <p:sp>
         <p:nvSpPr>
-          <p:cNvPr id="7" name="TextBox 6"/>
+          <p:cNvPr id="9" name="TextBox 8"/>
           <p:cNvSpPr txBox="1"/>
           <p:nvPr/>
         </p:nvSpPr>
         <p:spPr>
           <a:xfrm>
-            <a:off x="1508760" y="1600200"/>
+            <a:off x="1508760" y="1828800"/>
             <a:ext cx="2743200" cy="822960"/>
           </a:xfrm>
           <a:prstGeom prst="rect">
@@ -3674,7 +3823,7 @@
             <a:r>
               <a:rPr sz="1800" b="1" i="0">
                 <a:solidFill>
-                  <a:srgbClr val="59472C"/>
+                  <a:srgbClr val="493B27"/>
                 </a:solidFill>
               </a:rPr>
               <a:t>우리 모임 소개</a:t>
@@ -3684,13 +3833,13 @@
       </p:sp>
       <p:sp>
         <p:nvSpPr>
-          <p:cNvPr id="8" name="TextBox 7"/>
+          <p:cNvPr id="10" name="TextBox 9"/>
           <p:cNvSpPr txBox="1"/>
           <p:nvPr/>
         </p:nvSpPr>
         <p:spPr>
           <a:xfrm>
-            <a:off x="4297680" y="1600200"/>
+            <a:off x="4297680" y="1828800"/>
             <a:ext cx="7071055" cy="822960"/>
           </a:xfrm>
           <a:prstGeom prst="rect">
@@ -3712,7 +3861,7 @@
             <a:r>
               <a:rPr sz="1500" b="0" i="0">
                 <a:solidFill>
-                  <a:srgbClr val="2B2B2B"/>
+                  <a:srgbClr val="26231F"/>
                 </a:solidFill>
               </a:rPr>
               <a:t>한 줄로 내용을 적어 주세요</a:t>
@@ -3722,27 +3871,25 @@
       </p:sp>
       <p:sp>
         <p:nvSpPr>
-          <p:cNvPr id="9" name="줄 2"/>
+          <p:cNvPr id="11" name="줄 2"/>
           <p:cNvSpPr/>
           <p:nvPr/>
         </p:nvSpPr>
         <p:spPr>
           <a:xfrm>
-            <a:off x="640080" y="2606039"/>
+            <a:off x="640080" y="2834639"/>
             <a:ext cx="10911535" cy="914400"/>
           </a:xfrm>
           <a:prstGeom prst="roundRect">
             <a:avLst>
-              <a:gd name="adj" fmla="val 8000"/>
+              <a:gd name="adj" fmla="val 4000"/>
             </a:avLst>
           </a:prstGeom>
           <a:solidFill>
-            <a:srgbClr val="F8F5F1"/>
+            <a:srgbClr val="FBF5EC"/>
           </a:solidFill>
-          <a:ln w="12700">
-            <a:solidFill>
-              <a:srgbClr val="ECE3D4"/>
-            </a:solidFill>
+          <a:ln>
+            <a:noFill/>
           </a:ln>
         </p:spPr>
         <p:txBody>
@@ -3755,20 +3902,49 @@
       </p:sp>
       <p:sp>
         <p:nvSpPr>
-          <p:cNvPr id="10" name="번호 2"/>
+          <p:cNvPr id="12" name="포인트 막대"/>
           <p:cNvSpPr/>
           <p:nvPr/>
         </p:nvSpPr>
         <p:spPr>
           <a:xfrm>
-            <a:off x="822959" y="2834639"/>
+            <a:off x="640080" y="2944368"/>
+            <a:ext cx="54864" cy="694944"/>
+          </a:xfrm>
+          <a:prstGeom prst="rect">
+            <a:avLst/>
+          </a:prstGeom>
+          <a:solidFill>
+            <a:srgbClr val="D8B279"/>
+          </a:solidFill>
+          <a:ln>
+            <a:noFill/>
+          </a:ln>
+        </p:spPr>
+        <p:txBody>
+          <a:bodyPr rtlCol="0" anchor="ctr"/>
+          <a:lstStyle/>
+          <a:p>
+            <a:pPr algn="ctr"/>
+          </a:p>
+        </p:txBody>
+      </p:sp>
+      <p:sp>
+        <p:nvSpPr>
+          <p:cNvPr id="13" name="번호 2"/>
+          <p:cNvSpPr/>
+          <p:nvPr/>
+        </p:nvSpPr>
+        <p:spPr>
+          <a:xfrm>
+            <a:off x="822959" y="3063239"/>
             <a:ext cx="457200" cy="457200"/>
           </a:xfrm>
           <a:prstGeom prst="ellipse">
             <a:avLst/>
           </a:prstGeom>
           <a:solidFill>
-            <a:srgbClr val="9D7D4D"/>
+            <a:srgbClr val="DCE198"/>
           </a:solidFill>
           <a:ln>
             <a:noFill/>
@@ -3788,7 +3964,7 @@
             <a:r>
               <a:rPr sz="1600" b="1" i="0">
                 <a:solidFill>
-                  <a:srgbClr val="FFFFFF"/>
+                  <a:srgbClr val="26231F"/>
                 </a:solidFill>
               </a:rPr>
               <a:t>2</a:t>
@@ -3798,13 +3974,13 @@
       </p:sp>
       <p:sp>
         <p:nvSpPr>
-          <p:cNvPr id="11" name="TextBox 10"/>
+          <p:cNvPr id="14" name="TextBox 13"/>
           <p:cNvSpPr txBox="1"/>
           <p:nvPr/>
         </p:nvSpPr>
         <p:spPr>
           <a:xfrm>
-            <a:off x="1508760" y="2651759"/>
+            <a:off x="1508760" y="2880359"/>
             <a:ext cx="2743200" cy="822960"/>
           </a:xfrm>
           <a:prstGeom prst="rect">
@@ -3826,7 +4002,7 @@
             <a:r>
               <a:rPr sz="1800" b="1" i="0">
                 <a:solidFill>
-                  <a:srgbClr val="59472C"/>
+                  <a:srgbClr val="493B27"/>
                 </a:solidFill>
               </a:rPr>
               <a:t>활동 이야기</a:t>
@@ -3836,13 +4012,13 @@
       </p:sp>
       <p:sp>
         <p:nvSpPr>
-          <p:cNvPr id="12" name="TextBox 11"/>
+          <p:cNvPr id="15" name="TextBox 14"/>
           <p:cNvSpPr txBox="1"/>
           <p:nvPr/>
         </p:nvSpPr>
         <p:spPr>
           <a:xfrm>
-            <a:off x="4297680" y="2651759"/>
+            <a:off x="4297680" y="2880359"/>
             <a:ext cx="7071055" cy="822960"/>
           </a:xfrm>
           <a:prstGeom prst="rect">
@@ -3864,7 +4040,7 @@
             <a:r>
               <a:rPr sz="1500" b="0" i="0">
                 <a:solidFill>
-                  <a:srgbClr val="2B2B2B"/>
+                  <a:srgbClr val="26231F"/>
                 </a:solidFill>
               </a:rPr>
               <a:t>한 줄로 내용을 적어 주세요</a:t>
@@ -3874,27 +4050,25 @@
       </p:sp>
       <p:sp>
         <p:nvSpPr>
-          <p:cNvPr id="13" name="줄 3"/>
+          <p:cNvPr id="16" name="줄 3"/>
           <p:cNvSpPr/>
           <p:nvPr/>
         </p:nvSpPr>
         <p:spPr>
           <a:xfrm>
-            <a:off x="640080" y="3657600"/>
+            <a:off x="640080" y="3886200"/>
             <a:ext cx="10911535" cy="914400"/>
           </a:xfrm>
           <a:prstGeom prst="roundRect">
             <a:avLst>
-              <a:gd name="adj" fmla="val 8000"/>
+              <a:gd name="adj" fmla="val 4000"/>
             </a:avLst>
           </a:prstGeom>
           <a:solidFill>
-            <a:srgbClr val="F8F5F1"/>
+            <a:srgbClr val="FBF5EC"/>
           </a:solidFill>
-          <a:ln w="12700">
-            <a:solidFill>
-              <a:srgbClr val="ECE3D4"/>
-            </a:solidFill>
+          <a:ln>
+            <a:noFill/>
           </a:ln>
         </p:spPr>
         <p:txBody>
@@ -3907,20 +4081,49 @@
       </p:sp>
       <p:sp>
         <p:nvSpPr>
-          <p:cNvPr id="14" name="번호 3"/>
+          <p:cNvPr id="17" name="포인트 막대"/>
           <p:cNvSpPr/>
           <p:nvPr/>
         </p:nvSpPr>
         <p:spPr>
           <a:xfrm>
-            <a:off x="822959" y="3886200"/>
+            <a:off x="640080" y="3995928"/>
+            <a:ext cx="54864" cy="694944"/>
+          </a:xfrm>
+          <a:prstGeom prst="rect">
+            <a:avLst/>
+          </a:prstGeom>
+          <a:solidFill>
+            <a:srgbClr val="D8B279"/>
+          </a:solidFill>
+          <a:ln>
+            <a:noFill/>
+          </a:ln>
+        </p:spPr>
+        <p:txBody>
+          <a:bodyPr rtlCol="0" anchor="ctr"/>
+          <a:lstStyle/>
+          <a:p>
+            <a:pPr algn="ctr"/>
+          </a:p>
+        </p:txBody>
+      </p:sp>
+      <p:sp>
+        <p:nvSpPr>
+          <p:cNvPr id="18" name="번호 3"/>
+          <p:cNvSpPr/>
+          <p:nvPr/>
+        </p:nvSpPr>
+        <p:spPr>
+          <a:xfrm>
+            <a:off x="822959" y="4114800"/>
             <a:ext cx="457200" cy="457200"/>
           </a:xfrm>
           <a:prstGeom prst="ellipse">
             <a:avLst/>
           </a:prstGeom>
           <a:solidFill>
-            <a:srgbClr val="9D7D4D"/>
+            <a:srgbClr val="DCE198"/>
           </a:solidFill>
           <a:ln>
             <a:noFill/>
@@ -3940,7 +4143,7 @@
             <a:r>
               <a:rPr sz="1600" b="1" i="0">
                 <a:solidFill>
-                  <a:srgbClr val="FFFFFF"/>
+                  <a:srgbClr val="26231F"/>
                 </a:solidFill>
               </a:rPr>
               <a:t>3</a:t>
@@ -3950,13 +4153,13 @@
       </p:sp>
       <p:sp>
         <p:nvSpPr>
-          <p:cNvPr id="15" name="TextBox 14"/>
+          <p:cNvPr id="19" name="TextBox 18"/>
           <p:cNvSpPr txBox="1"/>
           <p:nvPr/>
         </p:nvSpPr>
         <p:spPr>
           <a:xfrm>
-            <a:off x="1508760" y="3703320"/>
+            <a:off x="1508760" y="3931920"/>
             <a:ext cx="2743200" cy="822960"/>
           </a:xfrm>
           <a:prstGeom prst="rect">
@@ -3978,7 +4181,7 @@
             <a:r>
               <a:rPr sz="1800" b="1" i="0">
                 <a:solidFill>
-                  <a:srgbClr val="59472C"/>
+                  <a:srgbClr val="493B27"/>
                 </a:solidFill>
               </a:rPr>
               <a:t>함께하는 사람들</a:t>
@@ -3988,13 +4191,13 @@
       </p:sp>
       <p:sp>
         <p:nvSpPr>
-          <p:cNvPr id="16" name="TextBox 15"/>
+          <p:cNvPr id="20" name="TextBox 19"/>
           <p:cNvSpPr txBox="1"/>
           <p:nvPr/>
         </p:nvSpPr>
         <p:spPr>
           <a:xfrm>
-            <a:off x="4297680" y="3703320"/>
+            <a:off x="4297680" y="3931920"/>
             <a:ext cx="7071055" cy="822960"/>
           </a:xfrm>
           <a:prstGeom prst="rect">
@@ -4016,7 +4219,7 @@
             <a:r>
               <a:rPr sz="1500" b="0" i="0">
                 <a:solidFill>
-                  <a:srgbClr val="2B2B2B"/>
+                  <a:srgbClr val="26231F"/>
                 </a:solidFill>
               </a:rPr>
               <a:t>한 줄로 내용을 적어 주세요</a:t>
@@ -4026,27 +4229,25 @@
       </p:sp>
       <p:sp>
         <p:nvSpPr>
-          <p:cNvPr id="17" name="줄 4"/>
+          <p:cNvPr id="21" name="줄 4"/>
           <p:cNvSpPr/>
           <p:nvPr/>
         </p:nvSpPr>
         <p:spPr>
           <a:xfrm>
-            <a:off x="640080" y="4709159"/>
+            <a:off x="640080" y="4937759"/>
             <a:ext cx="10911535" cy="914400"/>
           </a:xfrm>
           <a:prstGeom prst="roundRect">
             <a:avLst>
-              <a:gd name="adj" fmla="val 8000"/>
+              <a:gd name="adj" fmla="val 4000"/>
             </a:avLst>
           </a:prstGeom>
           <a:solidFill>
-            <a:srgbClr val="F8F5F1"/>
+            <a:srgbClr val="FBF5EC"/>
           </a:solidFill>
-          <a:ln w="12700">
-            <a:solidFill>
-              <a:srgbClr val="ECE3D4"/>
-            </a:solidFill>
+          <a:ln>
+            <a:noFill/>
           </a:ln>
         </p:spPr>
         <p:txBody>
@@ -4059,20 +4260,49 @@
       </p:sp>
       <p:sp>
         <p:nvSpPr>
-          <p:cNvPr id="18" name="번호 4"/>
+          <p:cNvPr id="22" name="포인트 막대"/>
           <p:cNvSpPr/>
           <p:nvPr/>
         </p:nvSpPr>
         <p:spPr>
           <a:xfrm>
-            <a:off x="822959" y="4937759"/>
+            <a:off x="640080" y="5047488"/>
+            <a:ext cx="54864" cy="694944"/>
+          </a:xfrm>
+          <a:prstGeom prst="rect">
+            <a:avLst/>
+          </a:prstGeom>
+          <a:solidFill>
+            <a:srgbClr val="D8B279"/>
+          </a:solidFill>
+          <a:ln>
+            <a:noFill/>
+          </a:ln>
+        </p:spPr>
+        <p:txBody>
+          <a:bodyPr rtlCol="0" anchor="ctr"/>
+          <a:lstStyle/>
+          <a:p>
+            <a:pPr algn="ctr"/>
+          </a:p>
+        </p:txBody>
+      </p:sp>
+      <p:sp>
+        <p:nvSpPr>
+          <p:cNvPr id="23" name="번호 4"/>
+          <p:cNvSpPr/>
+          <p:nvPr/>
+        </p:nvSpPr>
+        <p:spPr>
+          <a:xfrm>
+            <a:off x="822959" y="5166359"/>
             <a:ext cx="457200" cy="457200"/>
           </a:xfrm>
           <a:prstGeom prst="ellipse">
             <a:avLst/>
           </a:prstGeom>
           <a:solidFill>
-            <a:srgbClr val="9D7D4D"/>
+            <a:srgbClr val="DCE198"/>
           </a:solidFill>
           <a:ln>
             <a:noFill/>
@@ -4092,7 +4322,7 @@
             <a:r>
               <a:rPr sz="1600" b="1" i="0">
                 <a:solidFill>
-                  <a:srgbClr val="FFFFFF"/>
+                  <a:srgbClr val="26231F"/>
                 </a:solidFill>
               </a:rPr>
               <a:t>4</a:t>
@@ -4102,13 +4332,13 @@
       </p:sp>
       <p:sp>
         <p:nvSpPr>
-          <p:cNvPr id="19" name="TextBox 18"/>
+          <p:cNvPr id="24" name="TextBox 23"/>
           <p:cNvSpPr txBox="1"/>
           <p:nvPr/>
         </p:nvSpPr>
         <p:spPr>
           <a:xfrm>
-            <a:off x="1508760" y="4754879"/>
+            <a:off x="1508760" y="4983479"/>
             <a:ext cx="2743200" cy="822960"/>
           </a:xfrm>
           <a:prstGeom prst="rect">
@@ -4130,7 +4360,7 @@
             <a:r>
               <a:rPr sz="1800" b="1" i="0">
                 <a:solidFill>
-                  <a:srgbClr val="59472C"/>
+                  <a:srgbClr val="493B27"/>
                 </a:solidFill>
               </a:rPr>
               <a:t>참여 방법</a:t>
@@ -4140,13 +4370,13 @@
       </p:sp>
       <p:sp>
         <p:nvSpPr>
-          <p:cNvPr id="20" name="TextBox 19"/>
+          <p:cNvPr id="25" name="TextBox 24"/>
           <p:cNvSpPr txBox="1"/>
           <p:nvPr/>
         </p:nvSpPr>
         <p:spPr>
           <a:xfrm>
-            <a:off x="4297680" y="4754879"/>
+            <a:off x="4297680" y="4983479"/>
             <a:ext cx="7071055" cy="822960"/>
           </a:xfrm>
           <a:prstGeom prst="rect">
@@ -4168,7 +4398,7 @@
             <a:r>
               <a:rPr sz="1500" b="0" i="0">
                 <a:solidFill>
-                  <a:srgbClr val="2B2B2B"/>
+                  <a:srgbClr val="26231F"/>
                 </a:solidFill>
               </a:rPr>
               <a:t>한 줄로 내용을 적어 주세요</a:t>
@@ -4190,7 +4420,7 @@
     <p:bg>
       <p:bgPr>
         <a:solidFill>
-          <a:srgbClr val="FFFFFF"/>
+          <a:srgbClr val="F6E9D5"/>
         </a:solidFill>
         <a:effectLst/>
       </p:bgPr>
@@ -4210,14 +4440,14 @@
         </p:nvSpPr>
         <p:spPr>
           <a:xfrm>
-            <a:off x="-182880" y="6144768"/>
-            <a:ext cx="12557455" cy="731520"/>
-          </a:xfrm>
-          <a:prstGeom prst="wave">
+            <a:off x="10180015" y="-1645920"/>
+            <a:ext cx="3474720" cy="3474720"/>
+          </a:xfrm>
+          <a:prstGeom prst="ellipse">
             <a:avLst/>
           </a:prstGeom>
           <a:solidFill>
-            <a:srgbClr val="ECE3D4"/>
+            <a:srgbClr val="EBD2AD"/>
           </a:solidFill>
           <a:ln>
             <a:noFill/>
@@ -4233,20 +4463,58 @@
       </p:sp>
       <p:sp>
         <p:nvSpPr>
-          <p:cNvPr id="4" name="장식"/>
+          <p:cNvPr id="4" name="상단 라벨"/>
+          <p:cNvSpPr txBox="1"/>
+          <p:nvPr/>
+        </p:nvSpPr>
+        <p:spPr>
+          <a:xfrm>
+            <a:off x="640080" y="274320"/>
+            <a:ext cx="5486400" cy="274320"/>
+          </a:xfrm>
+          <a:prstGeom prst="rect">
+            <a:avLst/>
+          </a:prstGeom>
+          <a:noFill/>
+        </p:spPr>
+        <p:txBody>
+          <a:bodyPr wrap="square" lIns="54864" rIns="54864" tIns="27432" bIns="27432" anchor="ctr">
+            <a:noAutofit/>
+          </a:bodyPr>
+          <a:lstStyle/>
+          <a:p>
+            <a:pPr algn="l">
+              <a:lnSpc>
+                <a:spcPct val="115000"/>
+              </a:lnSpc>
+            </a:pPr>
+            <a:r>
+              <a:rPr sz="900" b="1" i="0" spc="250">
+                <a:solidFill>
+                  <a:srgbClr val="26231F"/>
+                </a:solidFill>
+              </a:rPr>
+              <a:t>PRESENTATION</a:t>
+            </a:r>
+          </a:p>
+        </p:txBody>
+      </p:sp>
+      <p:sp>
+        <p:nvSpPr>
+          <p:cNvPr id="5" name="포인트"/>
           <p:cNvSpPr/>
           <p:nvPr/>
         </p:nvSpPr>
         <p:spPr>
-          <a:xfrm>
-            <a:off x="-182880" y="6400800"/>
-            <a:ext cx="12557455" cy="502920"/>
-          </a:xfrm>
-          <a:prstGeom prst="wave">
+          <a:xfrm rot="18900000">
+            <a:off x="11048695" y="502919"/>
+            <a:ext cx="274320" cy="274320"/>
+          </a:xfrm>
+          <a:prstGeom prst="teardrop">
             <a:avLst/>
           </a:prstGeom>
           <a:solidFill>
-            <a:srgbClr val="9D7D4D"/>
+            <a:srgbClr val="FFFFFF"/>
           </a:solidFill>
           <a:ln>
             <a:noFill/>
@@ -4272,8 +4540,8 @@
         </p:nvSpPr>
         <p:spPr>
           <a:xfrm>
-            <a:off x="640080" y="457200"/>
-            <a:ext cx="9722815" cy="868680"/>
+            <a:off x="640080" y="658368"/>
+            <a:ext cx="9082735" cy="868680"/>
           </a:xfrm>
         </p:spPr>
         <p:txBody>
@@ -4290,7 +4558,7 @@
             <a:r>
               <a:rPr sz="3000" b="1" i="0">
                 <a:solidFill>
-                  <a:srgbClr val="59472C"/>
+                  <a:srgbClr val="26231F"/>
                 </a:solidFill>
               </a:rPr>
               <a:t>핵심 메시지</a:t>
@@ -4300,13 +4568,13 @@
       </p:sp>
       <p:sp>
         <p:nvSpPr>
-          <p:cNvPr id="5" name="핵심 문장"/>
+          <p:cNvPr id="6" name="핵심 문장"/>
           <p:cNvSpPr txBox="1"/>
           <p:nvPr/>
         </p:nvSpPr>
         <p:spPr>
           <a:xfrm>
-            <a:off x="640080" y="1554480"/>
+            <a:off x="640080" y="1783080"/>
             <a:ext cx="10911535" cy="1188720"/>
           </a:xfrm>
           <a:prstGeom prst="rect">
@@ -4328,7 +4596,7 @@
             <a:r>
               <a:rPr sz="2600" b="1" i="0">
                 <a:solidFill>
-                  <a:srgbClr val="59472C"/>
+                  <a:srgbClr val="493B27"/>
                 </a:solidFill>
               </a:rPr>
               <a:t>한 문장으로 말하면 — 여기에 핵심 메시지를 입력하세요</a:t>
@@ -4338,27 +4606,25 @@
       </p:sp>
       <p:sp>
         <p:nvSpPr>
-          <p:cNvPr id="6" name="카드 1"/>
+          <p:cNvPr id="7" name="카드 1"/>
           <p:cNvSpPr/>
           <p:nvPr/>
         </p:nvSpPr>
         <p:spPr>
           <a:xfrm>
-            <a:off x="640080" y="3017520"/>
+            <a:off x="640080" y="3246120"/>
             <a:ext cx="3484778" cy="3017520"/>
           </a:xfrm>
           <a:prstGeom prst="roundRect">
             <a:avLst>
-              <a:gd name="adj" fmla="val 8000"/>
+              <a:gd name="adj" fmla="val 4000"/>
             </a:avLst>
           </a:prstGeom>
           <a:solidFill>
-            <a:srgbClr val="F8F5F1"/>
+            <a:srgbClr val="FBF5EC"/>
           </a:solidFill>
-          <a:ln w="15875">
-            <a:solidFill>
-              <a:srgbClr val="ECE3D4"/>
-            </a:solidFill>
+          <a:ln>
+            <a:noFill/>
           </a:ln>
         </p:spPr>
         <p:txBody>
@@ -4371,20 +4637,49 @@
       </p:sp>
       <p:sp>
         <p:nvSpPr>
-          <p:cNvPr id="7" name="번호 1"/>
+          <p:cNvPr id="8" name="포인트 막대"/>
           <p:cNvSpPr/>
           <p:nvPr/>
         </p:nvSpPr>
         <p:spPr>
           <a:xfrm>
-            <a:off x="822959" y="3200400"/>
+            <a:off x="640080" y="3355848"/>
+            <a:ext cx="54864" cy="2798063"/>
+          </a:xfrm>
+          <a:prstGeom prst="rect">
+            <a:avLst/>
+          </a:prstGeom>
+          <a:solidFill>
+            <a:srgbClr val="D8B279"/>
+          </a:solidFill>
+          <a:ln>
+            <a:noFill/>
+          </a:ln>
+        </p:spPr>
+        <p:txBody>
+          <a:bodyPr rtlCol="0" anchor="ctr"/>
+          <a:lstStyle/>
+          <a:p>
+            <a:pPr algn="ctr"/>
+          </a:p>
+        </p:txBody>
+      </p:sp>
+      <p:sp>
+        <p:nvSpPr>
+          <p:cNvPr id="9" name="번호 1"/>
+          <p:cNvSpPr/>
+          <p:nvPr/>
+        </p:nvSpPr>
+        <p:spPr>
+          <a:xfrm>
+            <a:off x="822959" y="3429000"/>
             <a:ext cx="457200" cy="457200"/>
           </a:xfrm>
           <a:prstGeom prst="ellipse">
             <a:avLst/>
           </a:prstGeom>
           <a:solidFill>
-            <a:srgbClr val="9D7D4D"/>
+            <a:srgbClr val="DCE198"/>
           </a:solidFill>
           <a:ln>
             <a:noFill/>
@@ -4404,7 +4699,7 @@
             <a:r>
               <a:rPr sz="1600" b="1" i="0">
                 <a:solidFill>
-                  <a:srgbClr val="FFFFFF"/>
+                  <a:srgbClr val="26231F"/>
                 </a:solidFill>
               </a:rPr>
               <a:t>1</a:t>
@@ -4414,13 +4709,13 @@
       </p:sp>
       <p:sp>
         <p:nvSpPr>
-          <p:cNvPr id="8" name="TextBox 7"/>
+          <p:cNvPr id="10" name="TextBox 9"/>
           <p:cNvSpPr txBox="1"/>
           <p:nvPr/>
         </p:nvSpPr>
         <p:spPr>
           <a:xfrm>
-            <a:off x="777240" y="3794760"/>
+            <a:off x="777240" y="4023360"/>
             <a:ext cx="3210458" cy="640080"/>
           </a:xfrm>
           <a:prstGeom prst="rect">
@@ -4442,7 +4737,7 @@
             <a:r>
               <a:rPr sz="1800" b="1" i="0">
                 <a:solidFill>
-                  <a:srgbClr val="59472C"/>
+                  <a:srgbClr val="493B27"/>
                 </a:solidFill>
               </a:rPr>
               <a:t>모임의 취지</a:t>
@@ -4452,13 +4747,13 @@
       </p:sp>
       <p:sp>
         <p:nvSpPr>
-          <p:cNvPr id="9" name="TextBox 8"/>
+          <p:cNvPr id="11" name="TextBox 10"/>
           <p:cNvSpPr txBox="1"/>
           <p:nvPr/>
         </p:nvSpPr>
         <p:spPr>
           <a:xfrm>
-            <a:off x="777240" y="4480560"/>
+            <a:off x="777240" y="4709160"/>
             <a:ext cx="3210458" cy="1417319"/>
           </a:xfrm>
           <a:prstGeom prst="rect">
@@ -4480,7 +4775,7 @@
             <a:r>
               <a:rPr sz="1600" b="0" i="0">
                 <a:solidFill>
-                  <a:srgbClr val="2B2B2B"/>
+                  <a:srgbClr val="26231F"/>
                 </a:solidFill>
               </a:rPr>
               <a:t>내용을 입력하세요</a:t>
@@ -4495,7 +4790,7 @@
             <a:r>
               <a:rPr sz="1600" b="0" i="0">
                 <a:solidFill>
-                  <a:srgbClr val="2B2B2B"/>
+                  <a:srgbClr val="26231F"/>
                 </a:solidFill>
               </a:rPr>
               <a:t>내용을 입력하세요</a:t>
@@ -4505,27 +4800,25 @@
       </p:sp>
       <p:sp>
         <p:nvSpPr>
-          <p:cNvPr id="10" name="카드 2"/>
+          <p:cNvPr id="12" name="카드 2"/>
           <p:cNvSpPr/>
           <p:nvPr/>
         </p:nvSpPr>
         <p:spPr>
           <a:xfrm>
-            <a:off x="4353458" y="3017520"/>
+            <a:off x="4353458" y="3246120"/>
             <a:ext cx="3484778" cy="3017520"/>
           </a:xfrm>
           <a:prstGeom prst="roundRect">
             <a:avLst>
-              <a:gd name="adj" fmla="val 8000"/>
+              <a:gd name="adj" fmla="val 4000"/>
             </a:avLst>
           </a:prstGeom>
           <a:solidFill>
-            <a:srgbClr val="F8F5F1"/>
+            <a:srgbClr val="FBF5EC"/>
           </a:solidFill>
-          <a:ln w="15875">
-            <a:solidFill>
-              <a:srgbClr val="ECE3D4"/>
-            </a:solidFill>
+          <a:ln>
+            <a:noFill/>
           </a:ln>
         </p:spPr>
         <p:txBody>
@@ -4538,20 +4831,49 @@
       </p:sp>
       <p:sp>
         <p:nvSpPr>
-          <p:cNvPr id="11" name="번호 2"/>
+          <p:cNvPr id="13" name="포인트 막대"/>
           <p:cNvSpPr/>
           <p:nvPr/>
         </p:nvSpPr>
         <p:spPr>
           <a:xfrm>
-            <a:off x="4536338" y="3200400"/>
+            <a:off x="4353458" y="3355848"/>
+            <a:ext cx="54864" cy="2798063"/>
+          </a:xfrm>
+          <a:prstGeom prst="rect">
+            <a:avLst/>
+          </a:prstGeom>
+          <a:solidFill>
+            <a:srgbClr val="D8B279"/>
+          </a:solidFill>
+          <a:ln>
+            <a:noFill/>
+          </a:ln>
+        </p:spPr>
+        <p:txBody>
+          <a:bodyPr rtlCol="0" anchor="ctr"/>
+          <a:lstStyle/>
+          <a:p>
+            <a:pPr algn="ctr"/>
+          </a:p>
+        </p:txBody>
+      </p:sp>
+      <p:sp>
+        <p:nvSpPr>
+          <p:cNvPr id="14" name="번호 2"/>
+          <p:cNvSpPr/>
+          <p:nvPr/>
+        </p:nvSpPr>
+        <p:spPr>
+          <a:xfrm>
+            <a:off x="4536338" y="3429000"/>
             <a:ext cx="457200" cy="457200"/>
           </a:xfrm>
           <a:prstGeom prst="ellipse">
             <a:avLst/>
           </a:prstGeom>
           <a:solidFill>
-            <a:srgbClr val="9D7D4D"/>
+            <a:srgbClr val="DCE198"/>
           </a:solidFill>
           <a:ln>
             <a:noFill/>
@@ -4571,7 +4893,7 @@
             <a:r>
               <a:rPr sz="1600" b="1" i="0">
                 <a:solidFill>
-                  <a:srgbClr val="FFFFFF"/>
+                  <a:srgbClr val="26231F"/>
                 </a:solidFill>
               </a:rPr>
               <a:t>2</a:t>
@@ -4581,13 +4903,13 @@
       </p:sp>
       <p:sp>
         <p:nvSpPr>
-          <p:cNvPr id="12" name="TextBox 11"/>
+          <p:cNvPr id="15" name="TextBox 14"/>
           <p:cNvSpPr txBox="1"/>
           <p:nvPr/>
         </p:nvSpPr>
         <p:spPr>
           <a:xfrm>
-            <a:off x="4490618" y="3794760"/>
+            <a:off x="4490618" y="4023360"/>
             <a:ext cx="3210458" cy="640080"/>
           </a:xfrm>
           <a:prstGeom prst="rect">
@@ -4609,7 +4931,7 @@
             <a:r>
               <a:rPr sz="1800" b="1" i="0">
                 <a:solidFill>
-                  <a:srgbClr val="59472C"/>
+                  <a:srgbClr val="493B27"/>
                 </a:solidFill>
               </a:rPr>
               <a:t>활동 내용</a:t>
@@ -4619,13 +4941,13 @@
       </p:sp>
       <p:sp>
         <p:nvSpPr>
-          <p:cNvPr id="13" name="TextBox 12"/>
+          <p:cNvPr id="16" name="TextBox 15"/>
           <p:cNvSpPr txBox="1"/>
           <p:nvPr/>
         </p:nvSpPr>
         <p:spPr>
           <a:xfrm>
-            <a:off x="4490618" y="4480560"/>
+            <a:off x="4490618" y="4709160"/>
             <a:ext cx="3210458" cy="1417319"/>
           </a:xfrm>
           <a:prstGeom prst="rect">
@@ -4647,7 +4969,7 @@
             <a:r>
               <a:rPr sz="1600" b="0" i="0">
                 <a:solidFill>
-                  <a:srgbClr val="2B2B2B"/>
+                  <a:srgbClr val="26231F"/>
                 </a:solidFill>
               </a:rPr>
               <a:t>내용을 입력하세요</a:t>
@@ -4662,7 +4984,7 @@
             <a:r>
               <a:rPr sz="1600" b="0" i="0">
                 <a:solidFill>
-                  <a:srgbClr val="2B2B2B"/>
+                  <a:srgbClr val="26231F"/>
                 </a:solidFill>
               </a:rPr>
               <a:t>내용을 입력하세요</a:t>
@@ -4672,27 +4994,25 @@
       </p:sp>
       <p:sp>
         <p:nvSpPr>
-          <p:cNvPr id="14" name="카드 3"/>
+          <p:cNvPr id="17" name="카드 3"/>
           <p:cNvSpPr/>
           <p:nvPr/>
         </p:nvSpPr>
         <p:spPr>
           <a:xfrm>
-            <a:off x="8066836" y="3017520"/>
+            <a:off x="8066836" y="3246120"/>
             <a:ext cx="3484778" cy="3017520"/>
           </a:xfrm>
           <a:prstGeom prst="roundRect">
             <a:avLst>
-              <a:gd name="adj" fmla="val 8000"/>
+              <a:gd name="adj" fmla="val 4000"/>
             </a:avLst>
           </a:prstGeom>
           <a:solidFill>
-            <a:srgbClr val="F8F5F1"/>
+            <a:srgbClr val="FBF5EC"/>
           </a:solidFill>
-          <a:ln w="15875">
-            <a:solidFill>
-              <a:srgbClr val="ECE3D4"/>
-            </a:solidFill>
+          <a:ln>
+            <a:noFill/>
           </a:ln>
         </p:spPr>
         <p:txBody>
@@ -4705,20 +5025,49 @@
       </p:sp>
       <p:sp>
         <p:nvSpPr>
-          <p:cNvPr id="15" name="번호 3"/>
+          <p:cNvPr id="18" name="포인트 막대"/>
           <p:cNvSpPr/>
           <p:nvPr/>
         </p:nvSpPr>
         <p:spPr>
           <a:xfrm>
-            <a:off x="8249716" y="3200400"/>
+            <a:off x="8066836" y="3355848"/>
+            <a:ext cx="54864" cy="2798063"/>
+          </a:xfrm>
+          <a:prstGeom prst="rect">
+            <a:avLst/>
+          </a:prstGeom>
+          <a:solidFill>
+            <a:srgbClr val="D8B279"/>
+          </a:solidFill>
+          <a:ln>
+            <a:noFill/>
+          </a:ln>
+        </p:spPr>
+        <p:txBody>
+          <a:bodyPr rtlCol="0" anchor="ctr"/>
+          <a:lstStyle/>
+          <a:p>
+            <a:pPr algn="ctr"/>
+          </a:p>
+        </p:txBody>
+      </p:sp>
+      <p:sp>
+        <p:nvSpPr>
+          <p:cNvPr id="19" name="번호 3"/>
+          <p:cNvSpPr/>
+          <p:nvPr/>
+        </p:nvSpPr>
+        <p:spPr>
+          <a:xfrm>
+            <a:off x="8249716" y="3429000"/>
             <a:ext cx="457200" cy="457200"/>
           </a:xfrm>
           <a:prstGeom prst="ellipse">
             <a:avLst/>
           </a:prstGeom>
           <a:solidFill>
-            <a:srgbClr val="9D7D4D"/>
+            <a:srgbClr val="DCE198"/>
           </a:solidFill>
           <a:ln>
             <a:noFill/>
@@ -4738,7 +5087,7 @@
             <a:r>
               <a:rPr sz="1600" b="1" i="0">
                 <a:solidFill>
-                  <a:srgbClr val="FFFFFF"/>
+                  <a:srgbClr val="26231F"/>
                 </a:solidFill>
               </a:rPr>
               <a:t>3</a:t>
@@ -4748,13 +5097,13 @@
       </p:sp>
       <p:sp>
         <p:nvSpPr>
-          <p:cNvPr id="16" name="TextBox 15"/>
+          <p:cNvPr id="20" name="TextBox 19"/>
           <p:cNvSpPr txBox="1"/>
           <p:nvPr/>
         </p:nvSpPr>
         <p:spPr>
           <a:xfrm>
-            <a:off x="8203996" y="3794760"/>
+            <a:off x="8203996" y="4023360"/>
             <a:ext cx="3210458" cy="640080"/>
           </a:xfrm>
           <a:prstGeom prst="rect">
@@ -4776,7 +5125,7 @@
             <a:r>
               <a:rPr sz="1800" b="1" i="0">
                 <a:solidFill>
-                  <a:srgbClr val="59472C"/>
+                  <a:srgbClr val="493B27"/>
                 </a:solidFill>
               </a:rPr>
               <a:t>참여 혜택</a:t>
@@ -4786,13 +5135,13 @@
       </p:sp>
       <p:sp>
         <p:nvSpPr>
-          <p:cNvPr id="17" name="TextBox 16"/>
+          <p:cNvPr id="21" name="TextBox 20"/>
           <p:cNvSpPr txBox="1"/>
           <p:nvPr/>
         </p:nvSpPr>
         <p:spPr>
           <a:xfrm>
-            <a:off x="8203996" y="4480560"/>
+            <a:off x="8203996" y="4709160"/>
             <a:ext cx="3210458" cy="1417319"/>
           </a:xfrm>
           <a:prstGeom prst="rect">
@@ -4814,7 +5163,7 @@
             <a:r>
               <a:rPr sz="1600" b="0" i="0">
                 <a:solidFill>
-                  <a:srgbClr val="2B2B2B"/>
+                  <a:srgbClr val="26231F"/>
                 </a:solidFill>
               </a:rPr>
               <a:t>내용을 입력하세요</a:t>
@@ -4829,7 +5178,7 @@
             <a:r>
               <a:rPr sz="1600" b="0" i="0">
                 <a:solidFill>
-                  <a:srgbClr val="2B2B2B"/>
+                  <a:srgbClr val="26231F"/>
                 </a:solidFill>
               </a:rPr>
               <a:t>내용을 입력하세요</a:t>
@@ -4851,7 +5200,7 @@
     <p:bg>
       <p:bgPr>
         <a:solidFill>
-          <a:srgbClr val="FFFFFF"/>
+          <a:srgbClr val="F6E9D5"/>
         </a:solidFill>
         <a:effectLst/>
       </p:bgPr>
@@ -4871,14 +5220,14 @@
         </p:nvSpPr>
         <p:spPr>
           <a:xfrm>
-            <a:off x="-182880" y="6144768"/>
-            <a:ext cx="12557455" cy="731520"/>
-          </a:xfrm>
-          <a:prstGeom prst="wave">
+            <a:off x="10180015" y="-1645920"/>
+            <a:ext cx="3474720" cy="3474720"/>
+          </a:xfrm>
+          <a:prstGeom prst="ellipse">
             <a:avLst/>
           </a:prstGeom>
           <a:solidFill>
-            <a:srgbClr val="ECE3D4"/>
+            <a:srgbClr val="EBD2AD"/>
           </a:solidFill>
           <a:ln>
             <a:noFill/>
@@ -4894,20 +5243,58 @@
       </p:sp>
       <p:sp>
         <p:nvSpPr>
-          <p:cNvPr id="4" name="장식"/>
+          <p:cNvPr id="4" name="상단 라벨"/>
+          <p:cNvSpPr txBox="1"/>
+          <p:nvPr/>
+        </p:nvSpPr>
+        <p:spPr>
+          <a:xfrm>
+            <a:off x="640080" y="274320"/>
+            <a:ext cx="5486400" cy="274320"/>
+          </a:xfrm>
+          <a:prstGeom prst="rect">
+            <a:avLst/>
+          </a:prstGeom>
+          <a:noFill/>
+        </p:spPr>
+        <p:txBody>
+          <a:bodyPr wrap="square" lIns="54864" rIns="54864" tIns="27432" bIns="27432" anchor="ctr">
+            <a:noAutofit/>
+          </a:bodyPr>
+          <a:lstStyle/>
+          <a:p>
+            <a:pPr algn="l">
+              <a:lnSpc>
+                <a:spcPct val="115000"/>
+              </a:lnSpc>
+            </a:pPr>
+            <a:r>
+              <a:rPr sz="900" b="1" i="0" spc="250">
+                <a:solidFill>
+                  <a:srgbClr val="26231F"/>
+                </a:solidFill>
+              </a:rPr>
+              <a:t>PRESENTATION</a:t>
+            </a:r>
+          </a:p>
+        </p:txBody>
+      </p:sp>
+      <p:sp>
+        <p:nvSpPr>
+          <p:cNvPr id="5" name="포인트"/>
           <p:cNvSpPr/>
           <p:nvPr/>
         </p:nvSpPr>
         <p:spPr>
-          <a:xfrm>
-            <a:off x="-182880" y="6400800"/>
-            <a:ext cx="12557455" cy="502920"/>
-          </a:xfrm>
-          <a:prstGeom prst="wave">
+          <a:xfrm rot="18900000">
+            <a:off x="11048695" y="502919"/>
+            <a:ext cx="274320" cy="274320"/>
+          </a:xfrm>
+          <a:prstGeom prst="teardrop">
             <a:avLst/>
           </a:prstGeom>
           <a:solidFill>
-            <a:srgbClr val="9D7D4D"/>
+            <a:srgbClr val="FFFFFF"/>
           </a:solidFill>
           <a:ln>
             <a:noFill/>
@@ -4933,8 +5320,8 @@
         </p:nvSpPr>
         <p:spPr>
           <a:xfrm>
-            <a:off x="640080" y="457200"/>
-            <a:ext cx="9722815" cy="868680"/>
+            <a:off x="640080" y="658368"/>
+            <a:ext cx="9082735" cy="868680"/>
           </a:xfrm>
         </p:spPr>
         <p:txBody>
@@ -4951,7 +5338,7 @@
             <a:r>
               <a:rPr sz="3000" b="1" i="0">
                 <a:solidFill>
-                  <a:srgbClr val="59472C"/>
+                  <a:srgbClr val="26231F"/>
                 </a:solidFill>
               </a:rPr>
               <a:t>한눈에 비교</a:t>
@@ -4961,27 +5348,25 @@
       </p:sp>
       <p:sp>
         <p:nvSpPr>
-          <p:cNvPr id="5" name="왼쪽 칸"/>
+          <p:cNvPr id="6" name="왼쪽 칸"/>
           <p:cNvSpPr/>
           <p:nvPr/>
         </p:nvSpPr>
         <p:spPr>
           <a:xfrm>
-            <a:off x="640080" y="1554480"/>
-            <a:ext cx="5272887" cy="4389120"/>
+            <a:off x="640080" y="1783080"/>
+            <a:ext cx="5272887" cy="3291840"/>
           </a:xfrm>
           <a:prstGeom prst="roundRect">
             <a:avLst>
-              <a:gd name="adj" fmla="val 8000"/>
+              <a:gd name="adj" fmla="val 4000"/>
             </a:avLst>
           </a:prstGeom>
           <a:solidFill>
-            <a:srgbClr val="F8F5F1"/>
+            <a:srgbClr val="FBF5EC"/>
           </a:solidFill>
-          <a:ln w="12700">
-            <a:solidFill>
-              <a:srgbClr val="ECE3D4"/>
-            </a:solidFill>
+          <a:ln>
+            <a:noFill/>
           </a:ln>
         </p:spPr>
         <p:txBody>
@@ -4994,13 +5379,42 @@
       </p:sp>
       <p:sp>
         <p:nvSpPr>
-          <p:cNvPr id="6" name="칸 제목 바"/>
+          <p:cNvPr id="7" name="포인트 막대"/>
           <p:cNvSpPr/>
           <p:nvPr/>
         </p:nvSpPr>
         <p:spPr>
           <a:xfrm>
-            <a:off x="640080" y="1554480"/>
+            <a:off x="640080" y="1892807"/>
+            <a:ext cx="54864" cy="3072384"/>
+          </a:xfrm>
+          <a:prstGeom prst="rect">
+            <a:avLst/>
+          </a:prstGeom>
+          <a:solidFill>
+            <a:srgbClr val="D8B279"/>
+          </a:solidFill>
+          <a:ln>
+            <a:noFill/>
+          </a:ln>
+        </p:spPr>
+        <p:txBody>
+          <a:bodyPr rtlCol="0" anchor="ctr"/>
+          <a:lstStyle/>
+          <a:p>
+            <a:pPr algn="ctr"/>
+          </a:p>
+        </p:txBody>
+      </p:sp>
+      <p:sp>
+        <p:nvSpPr>
+          <p:cNvPr id="8" name="칸 제목 바"/>
+          <p:cNvSpPr/>
+          <p:nvPr/>
+        </p:nvSpPr>
+        <p:spPr>
+          <a:xfrm>
+            <a:off x="640080" y="1783080"/>
             <a:ext cx="5272887" cy="640080"/>
           </a:xfrm>
           <a:prstGeom prst="roundRect">
@@ -5009,7 +5423,7 @@
             </a:avLst>
           </a:prstGeom>
           <a:solidFill>
-            <a:srgbClr val="9D7D4D"/>
+            <a:srgbClr val="D8B279"/>
           </a:solidFill>
           <a:ln>
             <a:noFill/>
@@ -5025,13 +5439,13 @@
       </p:sp>
       <p:sp>
         <p:nvSpPr>
-          <p:cNvPr id="7" name="TextBox 6"/>
+          <p:cNvPr id="9" name="TextBox 8"/>
           <p:cNvSpPr txBox="1"/>
           <p:nvPr/>
         </p:nvSpPr>
         <p:spPr>
           <a:xfrm>
-            <a:off x="822959" y="1554480"/>
+            <a:off x="822959" y="1783080"/>
             <a:ext cx="4907127" cy="640080"/>
           </a:xfrm>
           <a:prstGeom prst="rect">
@@ -5053,7 +5467,7 @@
             <a:r>
               <a:rPr sz="1800" b="1" i="0">
                 <a:solidFill>
-                  <a:srgbClr val="FFFFFF"/>
+                  <a:srgbClr val="26231F"/>
                 </a:solidFill>
               </a:rPr>
               <a:t>처음</a:t>
@@ -5063,14 +5477,14 @@
       </p:sp>
       <p:sp>
         <p:nvSpPr>
-          <p:cNvPr id="8" name="TextBox 7"/>
+          <p:cNvPr id="10" name="TextBox 9"/>
           <p:cNvSpPr txBox="1"/>
           <p:nvPr/>
         </p:nvSpPr>
         <p:spPr>
           <a:xfrm>
-            <a:off x="868680" y="2377440"/>
-            <a:ext cx="4815687" cy="3474720"/>
+            <a:off x="868680" y="2606040"/>
+            <a:ext cx="4815687" cy="2377440"/>
           </a:xfrm>
           <a:prstGeom prst="rect">
             <a:avLst/>
@@ -5096,7 +5510,7 @@
             <a:r>
               <a:rPr sz="1500" b="0" i="0">
                 <a:solidFill>
-                  <a:srgbClr val="2B2B2B"/>
+                  <a:srgbClr val="26231F"/>
                 </a:solidFill>
               </a:rPr>
               <a:t>내용을 입력하세요</a:t>
@@ -5116,7 +5530,7 @@
             <a:r>
               <a:rPr sz="1500" b="0" i="0">
                 <a:solidFill>
-                  <a:srgbClr val="2B2B2B"/>
+                  <a:srgbClr val="26231F"/>
                 </a:solidFill>
               </a:rPr>
               <a:t>내용을 입력하세요</a:t>
@@ -5136,7 +5550,7 @@
             <a:r>
               <a:rPr sz="1500" b="0" i="0">
                 <a:solidFill>
-                  <a:srgbClr val="2B2B2B"/>
+                  <a:srgbClr val="26231F"/>
                 </a:solidFill>
               </a:rPr>
               <a:t>내용을 입력하세요</a:t>
@@ -5146,27 +5560,25 @@
       </p:sp>
       <p:sp>
         <p:nvSpPr>
-          <p:cNvPr id="9" name="오른쪽 칸"/>
+          <p:cNvPr id="11" name="오른쪽 칸"/>
           <p:cNvSpPr/>
           <p:nvPr/>
         </p:nvSpPr>
         <p:spPr>
           <a:xfrm>
-            <a:off x="6278727" y="1554480"/>
-            <a:ext cx="5272887" cy="4389120"/>
+            <a:off x="6278727" y="1783080"/>
+            <a:ext cx="5272887" cy="3291840"/>
           </a:xfrm>
           <a:prstGeom prst="roundRect">
             <a:avLst>
-              <a:gd name="adj" fmla="val 8000"/>
+              <a:gd name="adj" fmla="val 4000"/>
             </a:avLst>
           </a:prstGeom>
           <a:solidFill>
-            <a:srgbClr val="ECE3D4"/>
+            <a:srgbClr val="F6E9D5"/>
           </a:solidFill>
-          <a:ln w="12700">
-            <a:solidFill>
-              <a:srgbClr val="ECE3D4"/>
-            </a:solidFill>
+          <a:ln>
+            <a:noFill/>
           </a:ln>
         </p:spPr>
         <p:txBody>
@@ -5179,13 +5591,42 @@
       </p:sp>
       <p:sp>
         <p:nvSpPr>
-          <p:cNvPr id="10" name="칸 제목 바"/>
+          <p:cNvPr id="12" name="포인트 막대"/>
           <p:cNvSpPr/>
           <p:nvPr/>
         </p:nvSpPr>
         <p:spPr>
           <a:xfrm>
-            <a:off x="6278727" y="1554480"/>
+            <a:off x="6278727" y="1892807"/>
+            <a:ext cx="54864" cy="3072384"/>
+          </a:xfrm>
+          <a:prstGeom prst="rect">
+            <a:avLst/>
+          </a:prstGeom>
+          <a:solidFill>
+            <a:srgbClr val="D8B279"/>
+          </a:solidFill>
+          <a:ln>
+            <a:noFill/>
+          </a:ln>
+        </p:spPr>
+        <p:txBody>
+          <a:bodyPr rtlCol="0" anchor="ctr"/>
+          <a:lstStyle/>
+          <a:p>
+            <a:pPr algn="ctr"/>
+          </a:p>
+        </p:txBody>
+      </p:sp>
+      <p:sp>
+        <p:nvSpPr>
+          <p:cNvPr id="13" name="칸 제목 바"/>
+          <p:cNvSpPr/>
+          <p:nvPr/>
+        </p:nvSpPr>
+        <p:spPr>
+          <a:xfrm>
+            <a:off x="6278727" y="1783080"/>
             <a:ext cx="5272887" cy="640080"/>
           </a:xfrm>
           <a:prstGeom prst="roundRect">
@@ -5194,7 +5635,7 @@
             </a:avLst>
           </a:prstGeom>
           <a:solidFill>
-            <a:srgbClr val="59472C"/>
+            <a:srgbClr val="493B27"/>
           </a:solidFill>
           <a:ln>
             <a:noFill/>
@@ -5210,13 +5651,13 @@
       </p:sp>
       <p:sp>
         <p:nvSpPr>
-          <p:cNvPr id="11" name="TextBox 10"/>
+          <p:cNvPr id="14" name="TextBox 13"/>
           <p:cNvSpPr txBox="1"/>
           <p:nvPr/>
         </p:nvSpPr>
         <p:spPr>
           <a:xfrm>
-            <a:off x="6461607" y="1554480"/>
+            <a:off x="6461607" y="1783080"/>
             <a:ext cx="4907127" cy="640080"/>
           </a:xfrm>
           <a:prstGeom prst="rect">
@@ -5248,14 +5689,14 @@
       </p:sp>
       <p:sp>
         <p:nvSpPr>
-          <p:cNvPr id="12" name="TextBox 11"/>
+          <p:cNvPr id="15" name="TextBox 14"/>
           <p:cNvSpPr txBox="1"/>
           <p:nvPr/>
         </p:nvSpPr>
         <p:spPr>
           <a:xfrm>
-            <a:off x="6507327" y="2377440"/>
-            <a:ext cx="4815687" cy="3474720"/>
+            <a:off x="6507327" y="2606040"/>
+            <a:ext cx="4815687" cy="2377440"/>
           </a:xfrm>
           <a:prstGeom prst="rect">
             <a:avLst/>
@@ -5281,7 +5722,7 @@
             <a:r>
               <a:rPr sz="1500" b="0" i="0">
                 <a:solidFill>
-                  <a:srgbClr val="2B2B2B"/>
+                  <a:srgbClr val="26231F"/>
                 </a:solidFill>
               </a:rPr>
               <a:t>내용을 입력하세요</a:t>
@@ -5301,7 +5742,7 @@
             <a:r>
               <a:rPr sz="1500" b="0" i="0">
                 <a:solidFill>
-                  <a:srgbClr val="2B2B2B"/>
+                  <a:srgbClr val="26231F"/>
                 </a:solidFill>
               </a:rPr>
               <a:t>내용을 입력하세요</a:t>
@@ -5321,7 +5762,7 @@
             <a:r>
               <a:rPr sz="1500" b="0" i="0">
                 <a:solidFill>
-                  <a:srgbClr val="2B2B2B"/>
+                  <a:srgbClr val="26231F"/>
                 </a:solidFill>
               </a:rPr>
               <a:t>내용을 입력하세요</a:t>
@@ -5343,7 +5784,7 @@
     <p:bg>
       <p:bgPr>
         <a:solidFill>
-          <a:srgbClr val="FFFFFF"/>
+          <a:srgbClr val="F6E9D5"/>
         </a:solidFill>
         <a:effectLst/>
       </p:bgPr>
@@ -5363,14 +5804,14 @@
         </p:nvSpPr>
         <p:spPr>
           <a:xfrm>
-            <a:off x="-182880" y="6144768"/>
-            <a:ext cx="12557455" cy="731520"/>
-          </a:xfrm>
-          <a:prstGeom prst="wave">
+            <a:off x="10180015" y="-1645920"/>
+            <a:ext cx="3474720" cy="3474720"/>
+          </a:xfrm>
+          <a:prstGeom prst="ellipse">
             <a:avLst/>
           </a:prstGeom>
           <a:solidFill>
-            <a:srgbClr val="ECE3D4"/>
+            <a:srgbClr val="EBD2AD"/>
           </a:solidFill>
           <a:ln>
             <a:noFill/>
@@ -5386,20 +5827,58 @@
       </p:sp>
       <p:sp>
         <p:nvSpPr>
-          <p:cNvPr id="4" name="장식"/>
+          <p:cNvPr id="4" name="상단 라벨"/>
+          <p:cNvSpPr txBox="1"/>
+          <p:nvPr/>
+        </p:nvSpPr>
+        <p:spPr>
+          <a:xfrm>
+            <a:off x="640080" y="274320"/>
+            <a:ext cx="5486400" cy="274320"/>
+          </a:xfrm>
+          <a:prstGeom prst="rect">
+            <a:avLst/>
+          </a:prstGeom>
+          <a:noFill/>
+        </p:spPr>
+        <p:txBody>
+          <a:bodyPr wrap="square" lIns="54864" rIns="54864" tIns="27432" bIns="27432" anchor="ctr">
+            <a:noAutofit/>
+          </a:bodyPr>
+          <a:lstStyle/>
+          <a:p>
+            <a:pPr algn="l">
+              <a:lnSpc>
+                <a:spcPct val="115000"/>
+              </a:lnSpc>
+            </a:pPr>
+            <a:r>
+              <a:rPr sz="900" b="1" i="0" spc="250">
+                <a:solidFill>
+                  <a:srgbClr val="26231F"/>
+                </a:solidFill>
+              </a:rPr>
+              <a:t>PRESENTATION</a:t>
+            </a:r>
+          </a:p>
+        </p:txBody>
+      </p:sp>
+      <p:sp>
+        <p:nvSpPr>
+          <p:cNvPr id="5" name="포인트"/>
           <p:cNvSpPr/>
           <p:nvPr/>
         </p:nvSpPr>
         <p:spPr>
-          <a:xfrm>
-            <a:off x="-182880" y="6400800"/>
-            <a:ext cx="12557455" cy="502920"/>
-          </a:xfrm>
-          <a:prstGeom prst="wave">
+          <a:xfrm rot="18900000">
+            <a:off x="11048695" y="502919"/>
+            <a:ext cx="274320" cy="274320"/>
+          </a:xfrm>
+          <a:prstGeom prst="teardrop">
             <a:avLst/>
           </a:prstGeom>
           <a:solidFill>
-            <a:srgbClr val="9D7D4D"/>
+            <a:srgbClr val="FFFFFF"/>
           </a:solidFill>
           <a:ln>
             <a:noFill/>
@@ -5425,8 +5904,8 @@
         </p:nvSpPr>
         <p:spPr>
           <a:xfrm>
-            <a:off x="640080" y="457200"/>
-            <a:ext cx="9722815" cy="868680"/>
+            <a:off x="640080" y="658368"/>
+            <a:ext cx="9082735" cy="868680"/>
           </a:xfrm>
         </p:spPr>
         <p:txBody>
@@ -5443,7 +5922,7 @@
             <a:r>
               <a:rPr sz="3000" b="1" i="0">
                 <a:solidFill>
-                  <a:srgbClr val="59472C"/>
+                  <a:srgbClr val="26231F"/>
                 </a:solidFill>
               </a:rPr>
               <a:t>일정·현황</a:t>
@@ -5453,14 +5932,14 @@
       </p:sp>
       <p:graphicFrame>
         <p:nvGraphicFramePr>
-          <p:cNvPr id="5" name="표"/>
+          <p:cNvPr id="6" name="표"/>
           <p:cNvGraphicFramePr>
             <a:graphicFrameLocks noGrp="1"/>
           </p:cNvGraphicFramePr>
           <p:nvPr/>
         </p:nvGraphicFramePr>
         <p:xfrm>
-          <a:off x="640080" y="1554480"/>
+          <a:off x="640080" y="1783080"/>
           <a:ext cx="10911532" cy="3840480"/>
         </p:xfrm>
         <a:graphic>
@@ -5485,7 +5964,7 @@
                       <a:r>
                         <a:rPr sz="1500" b="1">
                           <a:solidFill>
-                            <a:srgbClr val="FFFFFF"/>
+                            <a:srgbClr val="26231F"/>
                           </a:solidFill>
                         </a:rPr>
                         <a:t>날짜</a:t>
@@ -5495,30 +5974,30 @@
                   <a:tcPr anchor="ctr" marL="73152" marR="73152">
                     <a:lnL w="9525" cap="flat" cmpd="sng" algn="ctr">
                       <a:solidFill>
-                        <a:srgbClr val="9D7D4D"/>
+                        <a:srgbClr val="D8B279"/>
                       </a:solidFill>
                       <a:prstDash val="solid"/>
                     </a:lnL>
                     <a:lnR w="9525" cap="flat" cmpd="sng" algn="ctr">
                       <a:solidFill>
-                        <a:srgbClr val="9D7D4D"/>
+                        <a:srgbClr val="D8B279"/>
                       </a:solidFill>
                       <a:prstDash val="solid"/>
                     </a:lnR>
                     <a:lnT w="9525" cap="flat" cmpd="sng" algn="ctr">
                       <a:solidFill>
-                        <a:srgbClr val="9D7D4D"/>
+                        <a:srgbClr val="D8B279"/>
                       </a:solidFill>
                       <a:prstDash val="solid"/>
                     </a:lnT>
                     <a:lnB w="9525" cap="flat" cmpd="sng" algn="ctr">
                       <a:solidFill>
-                        <a:srgbClr val="9D7D4D"/>
+                        <a:srgbClr val="D8B279"/>
                       </a:solidFill>
                       <a:prstDash val="solid"/>
                     </a:lnB>
                     <a:solidFill>
-                      <a:srgbClr val="9D7D4D"/>
+                      <a:srgbClr val="D8B279"/>
                     </a:solidFill>
                   </a:tcPr>
                 </a:tc>
@@ -5531,7 +6010,7 @@
                       <a:r>
                         <a:rPr sz="1500" b="1">
                           <a:solidFill>
-                            <a:srgbClr val="FFFFFF"/>
+                            <a:srgbClr val="26231F"/>
                           </a:solidFill>
                         </a:rPr>
                         <a:t>활동</a:t>
@@ -5541,30 +6020,30 @@
                   <a:tcPr anchor="ctr" marL="73152" marR="73152">
                     <a:lnL w="9525" cap="flat" cmpd="sng" algn="ctr">
                       <a:solidFill>
-                        <a:srgbClr val="9D7D4D"/>
+                        <a:srgbClr val="D8B279"/>
                       </a:solidFill>
                       <a:prstDash val="solid"/>
                     </a:lnL>
                     <a:lnR w="9525" cap="flat" cmpd="sng" algn="ctr">
                       <a:solidFill>
-                        <a:srgbClr val="9D7D4D"/>
+                        <a:srgbClr val="D8B279"/>
                       </a:solidFill>
                       <a:prstDash val="solid"/>
                     </a:lnR>
                     <a:lnT w="9525" cap="flat" cmpd="sng" algn="ctr">
                       <a:solidFill>
-                        <a:srgbClr val="9D7D4D"/>
+                        <a:srgbClr val="D8B279"/>
                       </a:solidFill>
                       <a:prstDash val="solid"/>
                     </a:lnT>
                     <a:lnB w="9525" cap="flat" cmpd="sng" algn="ctr">
                       <a:solidFill>
-                        <a:srgbClr val="9D7D4D"/>
+                        <a:srgbClr val="D8B279"/>
                       </a:solidFill>
                       <a:prstDash val="solid"/>
                     </a:lnB>
                     <a:solidFill>
-                      <a:srgbClr val="9D7D4D"/>
+                      <a:srgbClr val="D8B279"/>
                     </a:solidFill>
                   </a:tcPr>
                 </a:tc>
@@ -5577,7 +6056,7 @@
                       <a:r>
                         <a:rPr sz="1500" b="1">
                           <a:solidFill>
-                            <a:srgbClr val="FFFFFF"/>
+                            <a:srgbClr val="26231F"/>
                           </a:solidFill>
                         </a:rPr>
                         <a:t>장소</a:t>
@@ -5587,30 +6066,30 @@
                   <a:tcPr anchor="ctr" marL="73152" marR="73152">
                     <a:lnL w="9525" cap="flat" cmpd="sng" algn="ctr">
                       <a:solidFill>
-                        <a:srgbClr val="9D7D4D"/>
+                        <a:srgbClr val="D8B279"/>
                       </a:solidFill>
                       <a:prstDash val="solid"/>
                     </a:lnL>
                     <a:lnR w="9525" cap="flat" cmpd="sng" algn="ctr">
                       <a:solidFill>
-                        <a:srgbClr val="9D7D4D"/>
+                        <a:srgbClr val="D8B279"/>
                       </a:solidFill>
                       <a:prstDash val="solid"/>
                     </a:lnR>
                     <a:lnT w="9525" cap="flat" cmpd="sng" algn="ctr">
                       <a:solidFill>
-                        <a:srgbClr val="9D7D4D"/>
+                        <a:srgbClr val="D8B279"/>
                       </a:solidFill>
                       <a:prstDash val="solid"/>
                     </a:lnT>
                     <a:lnB w="9525" cap="flat" cmpd="sng" algn="ctr">
                       <a:solidFill>
-                        <a:srgbClr val="9D7D4D"/>
+                        <a:srgbClr val="D8B279"/>
                       </a:solidFill>
                       <a:prstDash val="solid"/>
                     </a:lnB>
                     <a:solidFill>
-                      <a:srgbClr val="9D7D4D"/>
+                      <a:srgbClr val="D8B279"/>
                     </a:solidFill>
                   </a:tcPr>
                 </a:tc>
@@ -5623,7 +6102,7 @@
                       <a:r>
                         <a:rPr sz="1500" b="1">
                           <a:solidFill>
-                            <a:srgbClr val="FFFFFF"/>
+                            <a:srgbClr val="26231F"/>
                           </a:solidFill>
                         </a:rPr>
                         <a:t>참석</a:t>
@@ -5633,30 +6112,30 @@
                   <a:tcPr anchor="ctr" marL="73152" marR="73152">
                     <a:lnL w="9525" cap="flat" cmpd="sng" algn="ctr">
                       <a:solidFill>
-                        <a:srgbClr val="9D7D4D"/>
+                        <a:srgbClr val="D8B279"/>
                       </a:solidFill>
                       <a:prstDash val="solid"/>
                     </a:lnL>
                     <a:lnR w="9525" cap="flat" cmpd="sng" algn="ctr">
                       <a:solidFill>
-                        <a:srgbClr val="9D7D4D"/>
+                        <a:srgbClr val="D8B279"/>
                       </a:solidFill>
                       <a:prstDash val="solid"/>
                     </a:lnR>
                     <a:lnT w="9525" cap="flat" cmpd="sng" algn="ctr">
                       <a:solidFill>
-                        <a:srgbClr val="9D7D4D"/>
+                        <a:srgbClr val="D8B279"/>
                       </a:solidFill>
                       <a:prstDash val="solid"/>
                     </a:lnT>
                     <a:lnB w="9525" cap="flat" cmpd="sng" algn="ctr">
                       <a:solidFill>
-                        <a:srgbClr val="9D7D4D"/>
+                        <a:srgbClr val="D8B279"/>
                       </a:solidFill>
                       <a:prstDash val="solid"/>
                     </a:lnB>
                     <a:solidFill>
-                      <a:srgbClr val="9D7D4D"/>
+                      <a:srgbClr val="D8B279"/>
                     </a:solidFill>
                   </a:tcPr>
                 </a:tc>
@@ -5671,7 +6150,7 @@
                       <a:r>
                         <a:rPr sz="1500" b="1">
                           <a:solidFill>
-                            <a:srgbClr val="59472C"/>
+                            <a:srgbClr val="493B27"/>
                           </a:solidFill>
                         </a:rPr>
                         <a:t>1</a:t>
@@ -5681,30 +6160,30 @@
                   <a:tcPr anchor="ctr" marL="73152" marR="73152">
                     <a:lnL w="9525" cap="flat" cmpd="sng" algn="ctr">
                       <a:solidFill>
-                        <a:srgbClr val="ECE3D4"/>
+                        <a:srgbClr val="F6E9D5"/>
                       </a:solidFill>
                       <a:prstDash val="solid"/>
                     </a:lnL>
                     <a:lnR w="9525" cap="flat" cmpd="sng" algn="ctr">
                       <a:solidFill>
-                        <a:srgbClr val="ECE3D4"/>
+                        <a:srgbClr val="F6E9D5"/>
                       </a:solidFill>
                       <a:prstDash val="solid"/>
                     </a:lnR>
                     <a:lnT w="9525" cap="flat" cmpd="sng" algn="ctr">
                       <a:solidFill>
-                        <a:srgbClr val="ECE3D4"/>
+                        <a:srgbClr val="F6E9D5"/>
                       </a:solidFill>
                       <a:prstDash val="solid"/>
                     </a:lnT>
                     <a:lnB w="9525" cap="flat" cmpd="sng" algn="ctr">
                       <a:solidFill>
-                        <a:srgbClr val="ECE3D4"/>
+                        <a:srgbClr val="F6E9D5"/>
                       </a:solidFill>
                       <a:prstDash val="solid"/>
                     </a:lnB>
                     <a:solidFill>
-                      <a:srgbClr val="ECE3D4"/>
+                      <a:srgbClr val="F6E9D5"/>
                     </a:solidFill>
                   </a:tcPr>
                 </a:tc>
@@ -5717,7 +6196,7 @@
                       <a:r>
                         <a:rPr sz="1500" b="0">
                           <a:solidFill>
-                            <a:srgbClr val="2B2B2B"/>
+                            <a:srgbClr val="26231F"/>
                           </a:solidFill>
                         </a:rPr>
                         <a:t>내용 입력</a:t>
@@ -5727,25 +6206,25 @@
                   <a:tcPr anchor="ctr" marL="73152" marR="73152">
                     <a:lnL w="9525" cap="flat" cmpd="sng" algn="ctr">
                       <a:solidFill>
-                        <a:srgbClr val="ECE3D4"/>
+                        <a:srgbClr val="F6E9D5"/>
                       </a:solidFill>
                       <a:prstDash val="solid"/>
                     </a:lnL>
                     <a:lnR w="9525" cap="flat" cmpd="sng" algn="ctr">
                       <a:solidFill>
-                        <a:srgbClr val="ECE3D4"/>
+                        <a:srgbClr val="F6E9D5"/>
                       </a:solidFill>
                       <a:prstDash val="solid"/>
                     </a:lnR>
                     <a:lnT w="9525" cap="flat" cmpd="sng" algn="ctr">
                       <a:solidFill>
-                        <a:srgbClr val="ECE3D4"/>
+                        <a:srgbClr val="F6E9D5"/>
                       </a:solidFill>
                       <a:prstDash val="solid"/>
                     </a:lnT>
                     <a:lnB w="9525" cap="flat" cmpd="sng" algn="ctr">
                       <a:solidFill>
-                        <a:srgbClr val="ECE3D4"/>
+                        <a:srgbClr val="F6E9D5"/>
                       </a:solidFill>
                       <a:prstDash val="solid"/>
                     </a:lnB>
@@ -5763,7 +6242,7 @@
                       <a:r>
                         <a:rPr sz="1500" b="0">
                           <a:solidFill>
-                            <a:srgbClr val="2B2B2B"/>
+                            <a:srgbClr val="26231F"/>
                           </a:solidFill>
                         </a:rPr>
                         <a:t/>
@@ -5773,25 +6252,25 @@
                   <a:tcPr anchor="ctr" marL="73152" marR="73152">
                     <a:lnL w="9525" cap="flat" cmpd="sng" algn="ctr">
                       <a:solidFill>
-                        <a:srgbClr val="ECE3D4"/>
+                        <a:srgbClr val="F6E9D5"/>
                       </a:solidFill>
                       <a:prstDash val="solid"/>
                     </a:lnL>
                     <a:lnR w="9525" cap="flat" cmpd="sng" algn="ctr">
                       <a:solidFill>
-                        <a:srgbClr val="ECE3D4"/>
+                        <a:srgbClr val="F6E9D5"/>
                       </a:solidFill>
                       <a:prstDash val="solid"/>
                     </a:lnR>
                     <a:lnT w="9525" cap="flat" cmpd="sng" algn="ctr">
                       <a:solidFill>
-                        <a:srgbClr val="ECE3D4"/>
+                        <a:srgbClr val="F6E9D5"/>
                       </a:solidFill>
                       <a:prstDash val="solid"/>
                     </a:lnT>
                     <a:lnB w="9525" cap="flat" cmpd="sng" algn="ctr">
                       <a:solidFill>
-                        <a:srgbClr val="ECE3D4"/>
+                        <a:srgbClr val="F6E9D5"/>
                       </a:solidFill>
                       <a:prstDash val="solid"/>
                     </a:lnB>
@@ -5809,7 +6288,7 @@
                       <a:r>
                         <a:rPr sz="1500" b="0">
                           <a:solidFill>
-                            <a:srgbClr val="2B2B2B"/>
+                            <a:srgbClr val="26231F"/>
                           </a:solidFill>
                         </a:rPr>
                         <a:t/>
@@ -5819,25 +6298,25 @@
                   <a:tcPr anchor="ctr" marL="73152" marR="73152">
                     <a:lnL w="9525" cap="flat" cmpd="sng" algn="ctr">
                       <a:solidFill>
-                        <a:srgbClr val="ECE3D4"/>
+                        <a:srgbClr val="F6E9D5"/>
                       </a:solidFill>
                       <a:prstDash val="solid"/>
                     </a:lnL>
                     <a:lnR w="9525" cap="flat" cmpd="sng" algn="ctr">
                       <a:solidFill>
-                        <a:srgbClr val="ECE3D4"/>
+                        <a:srgbClr val="F6E9D5"/>
                       </a:solidFill>
                       <a:prstDash val="solid"/>
                     </a:lnR>
                     <a:lnT w="9525" cap="flat" cmpd="sng" algn="ctr">
                       <a:solidFill>
-                        <a:srgbClr val="ECE3D4"/>
+                        <a:srgbClr val="F6E9D5"/>
                       </a:solidFill>
                       <a:prstDash val="solid"/>
                     </a:lnT>
                     <a:lnB w="9525" cap="flat" cmpd="sng" algn="ctr">
                       <a:solidFill>
-                        <a:srgbClr val="ECE3D4"/>
+                        <a:srgbClr val="F6E9D5"/>
                       </a:solidFill>
                       <a:prstDash val="solid"/>
                     </a:lnB>
@@ -5857,7 +6336,7 @@
                       <a:r>
                         <a:rPr sz="1500" b="1">
                           <a:solidFill>
-                            <a:srgbClr val="59472C"/>
+                            <a:srgbClr val="493B27"/>
                           </a:solidFill>
                         </a:rPr>
                         <a:t>2</a:t>
@@ -5867,30 +6346,30 @@
                   <a:tcPr anchor="ctr" marL="73152" marR="73152">
                     <a:lnL w="9525" cap="flat" cmpd="sng" algn="ctr">
                       <a:solidFill>
-                        <a:srgbClr val="ECE3D4"/>
+                        <a:srgbClr val="F6E9D5"/>
                       </a:solidFill>
                       <a:prstDash val="solid"/>
                     </a:lnL>
                     <a:lnR w="9525" cap="flat" cmpd="sng" algn="ctr">
                       <a:solidFill>
-                        <a:srgbClr val="ECE3D4"/>
+                        <a:srgbClr val="F6E9D5"/>
                       </a:solidFill>
                       <a:prstDash val="solid"/>
                     </a:lnR>
                     <a:lnT w="9525" cap="flat" cmpd="sng" algn="ctr">
                       <a:solidFill>
-                        <a:srgbClr val="ECE3D4"/>
+                        <a:srgbClr val="F6E9D5"/>
                       </a:solidFill>
                       <a:prstDash val="solid"/>
                     </a:lnT>
                     <a:lnB w="9525" cap="flat" cmpd="sng" algn="ctr">
                       <a:solidFill>
-                        <a:srgbClr val="ECE3D4"/>
+                        <a:srgbClr val="F6E9D5"/>
                       </a:solidFill>
                       <a:prstDash val="solid"/>
                     </a:lnB>
                     <a:solidFill>
-                      <a:srgbClr val="ECE3D4"/>
+                      <a:srgbClr val="F6E9D5"/>
                     </a:solidFill>
                   </a:tcPr>
                 </a:tc>
@@ -5903,7 +6382,7 @@
                       <a:r>
                         <a:rPr sz="1500" b="0">
                           <a:solidFill>
-                            <a:srgbClr val="2B2B2B"/>
+                            <a:srgbClr val="26231F"/>
                           </a:solidFill>
                         </a:rPr>
                         <a:t>내용 입력</a:t>
@@ -5913,30 +6392,30 @@
                   <a:tcPr anchor="ctr" marL="73152" marR="73152">
                     <a:lnL w="9525" cap="flat" cmpd="sng" algn="ctr">
                       <a:solidFill>
-                        <a:srgbClr val="ECE3D4"/>
+                        <a:srgbClr val="F6E9D5"/>
                       </a:solidFill>
                       <a:prstDash val="solid"/>
                     </a:lnL>
                     <a:lnR w="9525" cap="flat" cmpd="sng" algn="ctr">
                       <a:solidFill>
-                        <a:srgbClr val="ECE3D4"/>
+                        <a:srgbClr val="F6E9D5"/>
                       </a:solidFill>
                       <a:prstDash val="solid"/>
                     </a:lnR>
                     <a:lnT w="9525" cap="flat" cmpd="sng" algn="ctr">
                       <a:solidFill>
-                        <a:srgbClr val="ECE3D4"/>
+                        <a:srgbClr val="F6E9D5"/>
                       </a:solidFill>
                       <a:prstDash val="solid"/>
                     </a:lnT>
                     <a:lnB w="9525" cap="flat" cmpd="sng" algn="ctr">
                       <a:solidFill>
-                        <a:srgbClr val="ECE3D4"/>
+                        <a:srgbClr val="F6E9D5"/>
                       </a:solidFill>
                       <a:prstDash val="solid"/>
                     </a:lnB>
                     <a:solidFill>
-                      <a:srgbClr val="F8F5F1"/>
+                      <a:srgbClr val="FBF5EC"/>
                     </a:solidFill>
                   </a:tcPr>
                 </a:tc>
@@ -5949,7 +6428,7 @@
                       <a:r>
                         <a:rPr sz="1500" b="0">
                           <a:solidFill>
-                            <a:srgbClr val="2B2B2B"/>
+                            <a:srgbClr val="26231F"/>
                           </a:solidFill>
                         </a:rPr>
                         <a:t/>
@@ -5959,30 +6438,30 @@
                   <a:tcPr anchor="ctr" marL="73152" marR="73152">
                     <a:lnL w="9525" cap="flat" cmpd="sng" algn="ctr">
                       <a:solidFill>
-                        <a:srgbClr val="ECE3D4"/>
+                        <a:srgbClr val="F6E9D5"/>
                       </a:solidFill>
                       <a:prstDash val="solid"/>
                     </a:lnL>
                     <a:lnR w="9525" cap="flat" cmpd="sng" algn="ctr">
                       <a:solidFill>
-                        <a:srgbClr val="ECE3D4"/>
+                        <a:srgbClr val="F6E9D5"/>
                       </a:solidFill>
                       <a:prstDash val="solid"/>
                     </a:lnR>
                     <a:lnT w="9525" cap="flat" cmpd="sng" algn="ctr">
                       <a:solidFill>
-                        <a:srgbClr val="ECE3D4"/>
+                        <a:srgbClr val="F6E9D5"/>
                       </a:solidFill>
                       <a:prstDash val="solid"/>
                     </a:lnT>
                     <a:lnB w="9525" cap="flat" cmpd="sng" algn="ctr">
                       <a:solidFill>
-                        <a:srgbClr val="ECE3D4"/>
+                        <a:srgbClr val="F6E9D5"/>
                       </a:solidFill>
                       <a:prstDash val="solid"/>
                     </a:lnB>
                     <a:solidFill>
-                      <a:srgbClr val="F8F5F1"/>
+                      <a:srgbClr val="FBF5EC"/>
                     </a:solidFill>
                   </a:tcPr>
                 </a:tc>
@@ -5995,7 +6474,7 @@
                       <a:r>
                         <a:rPr sz="1500" b="0">
                           <a:solidFill>
-                            <a:srgbClr val="2B2B2B"/>
+                            <a:srgbClr val="26231F"/>
                           </a:solidFill>
                         </a:rPr>
                         <a:t/>
@@ -6005,30 +6484,30 @@
                   <a:tcPr anchor="ctr" marL="73152" marR="73152">
                     <a:lnL w="9525" cap="flat" cmpd="sng" algn="ctr">
                       <a:solidFill>
-                        <a:srgbClr val="ECE3D4"/>
+                        <a:srgbClr val="F6E9D5"/>
                       </a:solidFill>
                       <a:prstDash val="solid"/>
                     </a:lnL>
                     <a:lnR w="9525" cap="flat" cmpd="sng" algn="ctr">
                       <a:solidFill>
-                        <a:srgbClr val="ECE3D4"/>
+                        <a:srgbClr val="F6E9D5"/>
                       </a:solidFill>
                       <a:prstDash val="solid"/>
                     </a:lnR>
                     <a:lnT w="9525" cap="flat" cmpd="sng" algn="ctr">
                       <a:solidFill>
-                        <a:srgbClr val="ECE3D4"/>
+                        <a:srgbClr val="F6E9D5"/>
                       </a:solidFill>
                       <a:prstDash val="solid"/>
                     </a:lnT>
                     <a:lnB w="9525" cap="flat" cmpd="sng" algn="ctr">
                       <a:solidFill>
-                        <a:srgbClr val="ECE3D4"/>
+                        <a:srgbClr val="F6E9D5"/>
                       </a:solidFill>
                       <a:prstDash val="solid"/>
                     </a:lnB>
                     <a:solidFill>
-                      <a:srgbClr val="F8F5F1"/>
+                      <a:srgbClr val="FBF5EC"/>
                     </a:solidFill>
                   </a:tcPr>
                 </a:tc>
@@ -6043,7 +6522,7 @@
                       <a:r>
                         <a:rPr sz="1500" b="1">
                           <a:solidFill>
-                            <a:srgbClr val="59472C"/>
+                            <a:srgbClr val="493B27"/>
                           </a:solidFill>
                         </a:rPr>
                         <a:t>3</a:t>
@@ -6053,30 +6532,30 @@
                   <a:tcPr anchor="ctr" marL="73152" marR="73152">
                     <a:lnL w="9525" cap="flat" cmpd="sng" algn="ctr">
                       <a:solidFill>
-                        <a:srgbClr val="ECE3D4"/>
+                        <a:srgbClr val="F6E9D5"/>
                       </a:solidFill>
                       <a:prstDash val="solid"/>
                     </a:lnL>
                     <a:lnR w="9525" cap="flat" cmpd="sng" algn="ctr">
                       <a:solidFill>
-                        <a:srgbClr val="ECE3D4"/>
+                        <a:srgbClr val="F6E9D5"/>
                       </a:solidFill>
                       <a:prstDash val="solid"/>
                     </a:lnR>
                     <a:lnT w="9525" cap="flat" cmpd="sng" algn="ctr">
                       <a:solidFill>
-                        <a:srgbClr val="ECE3D4"/>
+                        <a:srgbClr val="F6E9D5"/>
                       </a:solidFill>
                       <a:prstDash val="solid"/>
                     </a:lnT>
                     <a:lnB w="9525" cap="flat" cmpd="sng" algn="ctr">
                       <a:solidFill>
-                        <a:srgbClr val="ECE3D4"/>
+                        <a:srgbClr val="F6E9D5"/>
                       </a:solidFill>
                       <a:prstDash val="solid"/>
                     </a:lnB>
                     <a:solidFill>
-                      <a:srgbClr val="ECE3D4"/>
+                      <a:srgbClr val="F6E9D5"/>
                     </a:solidFill>
                   </a:tcPr>
                 </a:tc>
@@ -6089,7 +6568,7 @@
                       <a:r>
                         <a:rPr sz="1500" b="0">
                           <a:solidFill>
-                            <a:srgbClr val="2B2B2B"/>
+                            <a:srgbClr val="26231F"/>
                           </a:solidFill>
                         </a:rPr>
                         <a:t>내용 입력</a:t>
@@ -6099,25 +6578,25 @@
                   <a:tcPr anchor="ctr" marL="73152" marR="73152">
                     <a:lnL w="9525" cap="flat" cmpd="sng" algn="ctr">
                       <a:solidFill>
-                        <a:srgbClr val="ECE3D4"/>
+                        <a:srgbClr val="F6E9D5"/>
                       </a:solidFill>
                       <a:prstDash val="solid"/>
                     </a:lnL>
                     <a:lnR w="9525" cap="flat" cmpd="sng" algn="ctr">
                       <a:solidFill>
-                        <a:srgbClr val="ECE3D4"/>
+                        <a:srgbClr val="F6E9D5"/>
                       </a:solidFill>
                       <a:prstDash val="solid"/>
                     </a:lnR>
                     <a:lnT w="9525" cap="flat" cmpd="sng" algn="ctr">
                       <a:solidFill>
-                        <a:srgbClr val="ECE3D4"/>
+                        <a:srgbClr val="F6E9D5"/>
                       </a:solidFill>
                       <a:prstDash val="solid"/>
                     </a:lnT>
                     <a:lnB w="9525" cap="flat" cmpd="sng" algn="ctr">
                       <a:solidFill>
-                        <a:srgbClr val="ECE3D4"/>
+                        <a:srgbClr val="F6E9D5"/>
                       </a:solidFill>
                       <a:prstDash val="solid"/>
                     </a:lnB>
@@ -6135,7 +6614,7 @@
                       <a:r>
                         <a:rPr sz="1500" b="0">
                           <a:solidFill>
-                            <a:srgbClr val="2B2B2B"/>
+                            <a:srgbClr val="26231F"/>
                           </a:solidFill>
                         </a:rPr>
                         <a:t/>
@@ -6145,25 +6624,25 @@
                   <a:tcPr anchor="ctr" marL="73152" marR="73152">
                     <a:lnL w="9525" cap="flat" cmpd="sng" algn="ctr">
                       <a:solidFill>
-                        <a:srgbClr val="ECE3D4"/>
+                        <a:srgbClr val="F6E9D5"/>
                       </a:solidFill>
                       <a:prstDash val="solid"/>
                     </a:lnL>
                     <a:lnR w="9525" cap="flat" cmpd="sng" algn="ctr">
                       <a:solidFill>
-                        <a:srgbClr val="ECE3D4"/>
+                        <a:srgbClr val="F6E9D5"/>
                       </a:solidFill>
                       <a:prstDash val="solid"/>
                     </a:lnR>
                     <a:lnT w="9525" cap="flat" cmpd="sng" algn="ctr">
                       <a:solidFill>
-                        <a:srgbClr val="ECE3D4"/>
+                        <a:srgbClr val="F6E9D5"/>
                       </a:solidFill>
                       <a:prstDash val="solid"/>
                     </a:lnT>
                     <a:lnB w="9525" cap="flat" cmpd="sng" algn="ctr">
                       <a:solidFill>
-                        <a:srgbClr val="ECE3D4"/>
+                        <a:srgbClr val="F6E9D5"/>
                       </a:solidFill>
                       <a:prstDash val="solid"/>
                     </a:lnB>
@@ -6181,7 +6660,7 @@
                       <a:r>
                         <a:rPr sz="1500" b="0">
                           <a:solidFill>
-                            <a:srgbClr val="2B2B2B"/>
+                            <a:srgbClr val="26231F"/>
                           </a:solidFill>
                         </a:rPr>
                         <a:t/>
@@ -6191,25 +6670,25 @@
                   <a:tcPr anchor="ctr" marL="73152" marR="73152">
                     <a:lnL w="9525" cap="flat" cmpd="sng" algn="ctr">
                       <a:solidFill>
-                        <a:srgbClr val="ECE3D4"/>
+                        <a:srgbClr val="F6E9D5"/>
                       </a:solidFill>
                       <a:prstDash val="solid"/>
                     </a:lnL>
                     <a:lnR w="9525" cap="flat" cmpd="sng" algn="ctr">
                       <a:solidFill>
-                        <a:srgbClr val="ECE3D4"/>
+                        <a:srgbClr val="F6E9D5"/>
                       </a:solidFill>
                       <a:prstDash val="solid"/>
                     </a:lnR>
                     <a:lnT w="9525" cap="flat" cmpd="sng" algn="ctr">
                       <a:solidFill>
-                        <a:srgbClr val="ECE3D4"/>
+                        <a:srgbClr val="F6E9D5"/>
                       </a:solidFill>
                       <a:prstDash val="solid"/>
                     </a:lnT>
                     <a:lnB w="9525" cap="flat" cmpd="sng" algn="ctr">
                       <a:solidFill>
-                        <a:srgbClr val="ECE3D4"/>
+                        <a:srgbClr val="F6E9D5"/>
                       </a:solidFill>
                       <a:prstDash val="solid"/>
                     </a:lnB>
@@ -6229,7 +6708,7 @@
                       <a:r>
                         <a:rPr sz="1500" b="1">
                           <a:solidFill>
-                            <a:srgbClr val="59472C"/>
+                            <a:srgbClr val="493B27"/>
                           </a:solidFill>
                         </a:rPr>
                         <a:t>4</a:t>
@@ -6239,30 +6718,30 @@
                   <a:tcPr anchor="ctr" marL="73152" marR="73152">
                     <a:lnL w="9525" cap="flat" cmpd="sng" algn="ctr">
                       <a:solidFill>
-                        <a:srgbClr val="ECE3D4"/>
+                        <a:srgbClr val="F6E9D5"/>
                       </a:solidFill>
                       <a:prstDash val="solid"/>
                     </a:lnL>
                     <a:lnR w="9525" cap="flat" cmpd="sng" algn="ctr">
                       <a:solidFill>
-                        <a:srgbClr val="ECE3D4"/>
+                        <a:srgbClr val="F6E9D5"/>
                       </a:solidFill>
                       <a:prstDash val="solid"/>
                     </a:lnR>
                     <a:lnT w="9525" cap="flat" cmpd="sng" algn="ctr">
                       <a:solidFill>
-                        <a:srgbClr val="ECE3D4"/>
+                        <a:srgbClr val="F6E9D5"/>
                       </a:solidFill>
                       <a:prstDash val="solid"/>
                     </a:lnT>
                     <a:lnB w="9525" cap="flat" cmpd="sng" algn="ctr">
                       <a:solidFill>
-                        <a:srgbClr val="ECE3D4"/>
+                        <a:srgbClr val="F6E9D5"/>
                       </a:solidFill>
                       <a:prstDash val="solid"/>
                     </a:lnB>
                     <a:solidFill>
-                      <a:srgbClr val="ECE3D4"/>
+                      <a:srgbClr val="F6E9D5"/>
                     </a:solidFill>
                   </a:tcPr>
                 </a:tc>
@@ -6275,7 +6754,7 @@
                       <a:r>
                         <a:rPr sz="1500" b="0">
                           <a:solidFill>
-                            <a:srgbClr val="2B2B2B"/>
+                            <a:srgbClr val="26231F"/>
                           </a:solidFill>
                         </a:rPr>
                         <a:t>내용 입력</a:t>
@@ -6285,30 +6764,30 @@
                   <a:tcPr anchor="ctr" marL="73152" marR="73152">
                     <a:lnL w="9525" cap="flat" cmpd="sng" algn="ctr">
                       <a:solidFill>
-                        <a:srgbClr val="ECE3D4"/>
+                        <a:srgbClr val="F6E9D5"/>
                       </a:solidFill>
                       <a:prstDash val="solid"/>
                     </a:lnL>
                     <a:lnR w="9525" cap="flat" cmpd="sng" algn="ctr">
                       <a:solidFill>
-                        <a:srgbClr val="ECE3D4"/>
+                        <a:srgbClr val="F6E9D5"/>
                       </a:solidFill>
                       <a:prstDash val="solid"/>
                     </a:lnR>
                     <a:lnT w="9525" cap="flat" cmpd="sng" algn="ctr">
                       <a:solidFill>
-                        <a:srgbClr val="ECE3D4"/>
+                        <a:srgbClr val="F6E9D5"/>
                       </a:solidFill>
                       <a:prstDash val="solid"/>
                     </a:lnT>
                     <a:lnB w="9525" cap="flat" cmpd="sng" algn="ctr">
                       <a:solidFill>
-                        <a:srgbClr val="ECE3D4"/>
+                        <a:srgbClr val="F6E9D5"/>
                       </a:solidFill>
                       <a:prstDash val="solid"/>
                     </a:lnB>
                     <a:solidFill>
-                      <a:srgbClr val="F8F5F1"/>
+                      <a:srgbClr val="FBF5EC"/>
                     </a:solidFill>
                   </a:tcPr>
                 </a:tc>
@@ -6321,7 +6800,7 @@
                       <a:r>
                         <a:rPr sz="1500" b="0">
                           <a:solidFill>
-                            <a:srgbClr val="2B2B2B"/>
+                            <a:srgbClr val="26231F"/>
                           </a:solidFill>
                         </a:rPr>
                         <a:t/>
@@ -6331,30 +6810,30 @@
                   <a:tcPr anchor="ctr" marL="73152" marR="73152">
                     <a:lnL w="9525" cap="flat" cmpd="sng" algn="ctr">
                       <a:solidFill>
-                        <a:srgbClr val="ECE3D4"/>
+                        <a:srgbClr val="F6E9D5"/>
                       </a:solidFill>
                       <a:prstDash val="solid"/>
                     </a:lnL>
                     <a:lnR w="9525" cap="flat" cmpd="sng" algn="ctr">
                       <a:solidFill>
-                        <a:srgbClr val="ECE3D4"/>
+                        <a:srgbClr val="F6E9D5"/>
                       </a:solidFill>
                       <a:prstDash val="solid"/>
                     </a:lnR>
                     <a:lnT w="9525" cap="flat" cmpd="sng" algn="ctr">
                       <a:solidFill>
-                        <a:srgbClr val="ECE3D4"/>
+                        <a:srgbClr val="F6E9D5"/>
                       </a:solidFill>
                       <a:prstDash val="solid"/>
                     </a:lnT>
                     <a:lnB w="9525" cap="flat" cmpd="sng" algn="ctr">
                       <a:solidFill>
-                        <a:srgbClr val="ECE3D4"/>
+                        <a:srgbClr val="F6E9D5"/>
                       </a:solidFill>
                       <a:prstDash val="solid"/>
                     </a:lnB>
                     <a:solidFill>
-                      <a:srgbClr val="F8F5F1"/>
+                      <a:srgbClr val="FBF5EC"/>
                     </a:solidFill>
                   </a:tcPr>
                 </a:tc>
@@ -6367,7 +6846,7 @@
                       <a:r>
                         <a:rPr sz="1500" b="0">
                           <a:solidFill>
-                            <a:srgbClr val="2B2B2B"/>
+                            <a:srgbClr val="26231F"/>
                           </a:solidFill>
                         </a:rPr>
                         <a:t/>
@@ -6377,30 +6856,30 @@
                   <a:tcPr anchor="ctr" marL="73152" marR="73152">
                     <a:lnL w="9525" cap="flat" cmpd="sng" algn="ctr">
                       <a:solidFill>
-                        <a:srgbClr val="ECE3D4"/>
+                        <a:srgbClr val="F6E9D5"/>
                       </a:solidFill>
                       <a:prstDash val="solid"/>
                     </a:lnL>
                     <a:lnR w="9525" cap="flat" cmpd="sng" algn="ctr">
                       <a:solidFill>
-                        <a:srgbClr val="ECE3D4"/>
+                        <a:srgbClr val="F6E9D5"/>
                       </a:solidFill>
                       <a:prstDash val="solid"/>
                     </a:lnR>
                     <a:lnT w="9525" cap="flat" cmpd="sng" algn="ctr">
                       <a:solidFill>
-                        <a:srgbClr val="ECE3D4"/>
+                        <a:srgbClr val="F6E9D5"/>
                       </a:solidFill>
                       <a:prstDash val="solid"/>
                     </a:lnT>
                     <a:lnB w="9525" cap="flat" cmpd="sng" algn="ctr">
                       <a:solidFill>
-                        <a:srgbClr val="ECE3D4"/>
+                        <a:srgbClr val="F6E9D5"/>
                       </a:solidFill>
                       <a:prstDash val="solid"/>
                     </a:lnB>
                     <a:solidFill>
-                      <a:srgbClr val="F8F5F1"/>
+                      <a:srgbClr val="FBF5EC"/>
                     </a:solidFill>
                   </a:tcPr>
                 </a:tc>
@@ -6415,7 +6894,7 @@
                       <a:r>
                         <a:rPr sz="1500" b="1">
                           <a:solidFill>
-                            <a:srgbClr val="59472C"/>
+                            <a:srgbClr val="493B27"/>
                           </a:solidFill>
                         </a:rPr>
                         <a:t>5</a:t>
@@ -6425,30 +6904,30 @@
                   <a:tcPr anchor="ctr" marL="73152" marR="73152">
                     <a:lnL w="9525" cap="flat" cmpd="sng" algn="ctr">
                       <a:solidFill>
-                        <a:srgbClr val="ECE3D4"/>
+                        <a:srgbClr val="F6E9D5"/>
                       </a:solidFill>
                       <a:prstDash val="solid"/>
                     </a:lnL>
                     <a:lnR w="9525" cap="flat" cmpd="sng" algn="ctr">
                       <a:solidFill>
-                        <a:srgbClr val="ECE3D4"/>
+                        <a:srgbClr val="F6E9D5"/>
                       </a:solidFill>
                       <a:prstDash val="solid"/>
                     </a:lnR>
                     <a:lnT w="9525" cap="flat" cmpd="sng" algn="ctr">
                       <a:solidFill>
-                        <a:srgbClr val="ECE3D4"/>
+                        <a:srgbClr val="F6E9D5"/>
                       </a:solidFill>
                       <a:prstDash val="solid"/>
                     </a:lnT>
                     <a:lnB w="9525" cap="flat" cmpd="sng" algn="ctr">
                       <a:solidFill>
-                        <a:srgbClr val="ECE3D4"/>
+                        <a:srgbClr val="F6E9D5"/>
                       </a:solidFill>
                       <a:prstDash val="solid"/>
                     </a:lnB>
                     <a:solidFill>
-                      <a:srgbClr val="ECE3D4"/>
+                      <a:srgbClr val="F6E9D5"/>
                     </a:solidFill>
                   </a:tcPr>
                 </a:tc>
@@ -6461,7 +6940,7 @@
                       <a:r>
                         <a:rPr sz="1500" b="0">
                           <a:solidFill>
-                            <a:srgbClr val="2B2B2B"/>
+                            <a:srgbClr val="26231F"/>
                           </a:solidFill>
                         </a:rPr>
                         <a:t>내용 입력</a:t>
@@ -6471,25 +6950,25 @@
                   <a:tcPr anchor="ctr" marL="73152" marR="73152">
                     <a:lnL w="9525" cap="flat" cmpd="sng" algn="ctr">
                       <a:solidFill>
-                        <a:srgbClr val="ECE3D4"/>
+                        <a:srgbClr val="F6E9D5"/>
                       </a:solidFill>
                       <a:prstDash val="solid"/>
                     </a:lnL>
                     <a:lnR w="9525" cap="flat" cmpd="sng" algn="ctr">
                       <a:solidFill>
-                        <a:srgbClr val="ECE3D4"/>
+                        <a:srgbClr val="F6E9D5"/>
                       </a:solidFill>
                       <a:prstDash val="solid"/>
                     </a:lnR>
                     <a:lnT w="9525" cap="flat" cmpd="sng" algn="ctr">
                       <a:solidFill>
-                        <a:srgbClr val="ECE3D4"/>
+                        <a:srgbClr val="F6E9D5"/>
                       </a:solidFill>
                       <a:prstDash val="solid"/>
                     </a:lnT>
                     <a:lnB w="9525" cap="flat" cmpd="sng" algn="ctr">
                       <a:solidFill>
-                        <a:srgbClr val="ECE3D4"/>
+                        <a:srgbClr val="F6E9D5"/>
                       </a:solidFill>
                       <a:prstDash val="solid"/>
                     </a:lnB>
@@ -6507,7 +6986,7 @@
                       <a:r>
                         <a:rPr sz="1500" b="0">
                           <a:solidFill>
-                            <a:srgbClr val="2B2B2B"/>
+                            <a:srgbClr val="26231F"/>
                           </a:solidFill>
                         </a:rPr>
                         <a:t/>
@@ -6517,25 +6996,25 @@
                   <a:tcPr anchor="ctr" marL="73152" marR="73152">
                     <a:lnL w="9525" cap="flat" cmpd="sng" algn="ctr">
                       <a:solidFill>
-                        <a:srgbClr val="ECE3D4"/>
+                        <a:srgbClr val="F6E9D5"/>
                       </a:solidFill>
                       <a:prstDash val="solid"/>
                     </a:lnL>
                     <a:lnR w="9525" cap="flat" cmpd="sng" algn="ctr">
                       <a:solidFill>
-                        <a:srgbClr val="ECE3D4"/>
+                        <a:srgbClr val="F6E9D5"/>
                       </a:solidFill>
                       <a:prstDash val="solid"/>
                     </a:lnR>
                     <a:lnT w="9525" cap="flat" cmpd="sng" algn="ctr">
                       <a:solidFill>
-                        <a:srgbClr val="ECE3D4"/>
+                        <a:srgbClr val="F6E9D5"/>
                       </a:solidFill>
                       <a:prstDash val="solid"/>
                     </a:lnT>
                     <a:lnB w="9525" cap="flat" cmpd="sng" algn="ctr">
                       <a:solidFill>
-                        <a:srgbClr val="ECE3D4"/>
+                        <a:srgbClr val="F6E9D5"/>
                       </a:solidFill>
                       <a:prstDash val="solid"/>
                     </a:lnB>
@@ -6553,7 +7032,7 @@
                       <a:r>
                         <a:rPr sz="1500" b="0">
                           <a:solidFill>
-                            <a:srgbClr val="2B2B2B"/>
+                            <a:srgbClr val="26231F"/>
                           </a:solidFill>
                         </a:rPr>
                         <a:t/>
@@ -6563,25 +7042,25 @@
                   <a:tcPr anchor="ctr" marL="73152" marR="73152">
                     <a:lnL w="9525" cap="flat" cmpd="sng" algn="ctr">
                       <a:solidFill>
-                        <a:srgbClr val="ECE3D4"/>
+                        <a:srgbClr val="F6E9D5"/>
                       </a:solidFill>
                       <a:prstDash val="solid"/>
                     </a:lnL>
                     <a:lnR w="9525" cap="flat" cmpd="sng" algn="ctr">
                       <a:solidFill>
-                        <a:srgbClr val="ECE3D4"/>
+                        <a:srgbClr val="F6E9D5"/>
                       </a:solidFill>
                       <a:prstDash val="solid"/>
                     </a:lnR>
                     <a:lnT w="9525" cap="flat" cmpd="sng" algn="ctr">
                       <a:solidFill>
-                        <a:srgbClr val="ECE3D4"/>
+                        <a:srgbClr val="F6E9D5"/>
                       </a:solidFill>
                       <a:prstDash val="solid"/>
                     </a:lnT>
                     <a:lnB w="9525" cap="flat" cmpd="sng" algn="ctr">
                       <a:solidFill>
-                        <a:srgbClr val="ECE3D4"/>
+                        <a:srgbClr val="F6E9D5"/>
                       </a:solidFill>
                       <a:prstDash val="solid"/>
                     </a:lnB>
@@ -6606,6 +7085,14 @@
 <file path=ppt/slides/slide6.xml><?xml version="1.0" encoding="utf-8"?>
 <p:sld xmlns:a="http://schemas.openxmlformats.org/drawingml/2006/main" xmlns:p="http://schemas.openxmlformats.org/presentationml/2006/main" xmlns:r="http://schemas.openxmlformats.org/officeDocument/2006/relationships">
   <p:cSld>
+    <p:bg>
+      <p:bgPr>
+        <a:solidFill>
+          <a:srgbClr val="493B27"/>
+        </a:solidFill>
+        <a:effectLst/>
+      </p:bgPr>
+    </p:bg>
     <p:spTree>
       <p:nvGrpSpPr>
         <p:cNvPr id="1" name=""/>
@@ -6613,30 +7100,106 @@
         <p:nvPr/>
       </p:nvGrpSpPr>
       <p:grpSpPr/>
-      <p:pic>
-        <p:nvPicPr>
-          <p:cNvPr id="3" name="표지 그림" descr="talk-29.jpg"/>
-          <p:cNvPicPr>
-            <a:picLocks noChangeAspect="1"/>
-          </p:cNvPicPr>
+      <p:sp>
+        <p:nvSpPr>
+          <p:cNvPr id="3" name="장식"/>
+          <p:cNvSpPr/>
           <p:nvPr/>
-        </p:nvPicPr>
-        <p:blipFill>
-          <a:blip r:embed="rId2"/>
-          <a:stretch>
-            <a:fillRect/>
-          </a:stretch>
-        </p:blipFill>
-        <p:spPr>
-          <a:xfrm>
-            <a:off x="0" y="0"/>
-            <a:ext cx="12191695" cy="6858000"/>
+        </p:nvSpPr>
+        <p:spPr>
+          <a:xfrm>
+            <a:off x="1463003" y="960120"/>
+            <a:ext cx="3657508" cy="4526280"/>
+          </a:xfrm>
+          <a:prstGeom prst="roundRect">
+            <a:avLst>
+              <a:gd name="adj" fmla="val 4000"/>
+            </a:avLst>
+          </a:prstGeom>
+          <a:solidFill>
+            <a:srgbClr val="D8B279"/>
+          </a:solidFill>
+          <a:ln>
+            <a:noFill/>
+          </a:ln>
+        </p:spPr>
+        <p:txBody>
+          <a:bodyPr rtlCol="0" anchor="ctr"/>
+          <a:lstStyle/>
+          <a:p>
+            <a:pPr algn="ctr"/>
+          </a:p>
+        </p:txBody>
+      </p:sp>
+      <p:sp>
+        <p:nvSpPr>
+          <p:cNvPr id="4" name="장식"/>
+          <p:cNvSpPr/>
+          <p:nvPr/>
+        </p:nvSpPr>
+        <p:spPr>
+          <a:xfrm>
+            <a:off x="975335" y="1234439"/>
+            <a:ext cx="3657508" cy="4526280"/>
+          </a:xfrm>
+          <a:prstGeom prst="roundRect">
+            <a:avLst>
+              <a:gd name="adj" fmla="val 4000"/>
+            </a:avLst>
+          </a:prstGeom>
+          <a:noFill/>
+          <a:ln w="9525">
+            <a:solidFill>
+              <a:srgbClr val="FFFFFF"/>
+            </a:solidFill>
+          </a:ln>
+        </p:spPr>
+        <p:txBody>
+          <a:bodyPr rtlCol="0" anchor="ctr"/>
+          <a:lstStyle/>
+          <a:p>
+            <a:pPr algn="ctr"/>
+          </a:p>
+        </p:txBody>
+      </p:sp>
+      <p:sp>
+        <p:nvSpPr>
+          <p:cNvPr id="5" name="라벨"/>
+          <p:cNvSpPr txBox="1"/>
+          <p:nvPr/>
+        </p:nvSpPr>
+        <p:spPr>
+          <a:xfrm>
+            <a:off x="6827349" y="2148840"/>
+            <a:ext cx="4632844" cy="274320"/>
           </a:xfrm>
           <a:prstGeom prst="rect">
             <a:avLst/>
           </a:prstGeom>
-        </p:spPr>
-      </p:pic>
+          <a:noFill/>
+        </p:spPr>
+        <p:txBody>
+          <a:bodyPr wrap="square" lIns="54864" rIns="54864" tIns="27432" bIns="27432" anchor="t">
+            <a:noAutofit/>
+          </a:bodyPr>
+          <a:lstStyle/>
+          <a:p>
+            <a:pPr algn="l">
+              <a:lnSpc>
+                <a:spcPct val="115000"/>
+              </a:lnSpc>
+            </a:pPr>
+            <a:r>
+              <a:rPr sz="1000" b="1" i="0" spc="250">
+                <a:solidFill>
+                  <a:srgbClr val="FFFFFF"/>
+                </a:solidFill>
+              </a:rPr>
+              <a:t>PRESENTATION</a:t>
+            </a:r>
+          </a:p>
+        </p:txBody>
+      </p:sp>
       <p:sp>
         <p:nvSpPr>
           <p:cNvPr id="2" name="Title 1"/>
@@ -6649,8 +7212,8 @@
         </p:nvSpPr>
         <p:spPr>
           <a:xfrm>
-            <a:off x="853418" y="2057400"/>
-            <a:ext cx="6095847" cy="1554480"/>
+            <a:off x="6827349" y="2606040"/>
+            <a:ext cx="4632844" cy="1188720"/>
           </a:xfrm>
         </p:spPr>
         <p:txBody>
@@ -6665,9 +7228,9 @@
               </a:lnSpc>
             </a:pPr>
             <a:r>
-              <a:rPr sz="3600" b="1" i="0">
+              <a:rPr sz="4000" b="1" i="0">
                 <a:solidFill>
-                  <a:srgbClr val="59472C"/>
+                  <a:srgbClr val="FFFFFF"/>
                 </a:solidFill>
               </a:rPr>
               <a:t>감사합니다</a:t>
@@ -6677,14 +7240,14 @@
       </p:sp>
       <p:sp>
         <p:nvSpPr>
-          <p:cNvPr id="4" name="한 줄 문구"/>
+          <p:cNvPr id="6" name="한 줄 문구"/>
           <p:cNvSpPr txBox="1"/>
           <p:nvPr/>
         </p:nvSpPr>
         <p:spPr>
           <a:xfrm>
-            <a:off x="853418" y="3749039"/>
-            <a:ext cx="6095847" cy="822960"/>
+            <a:off x="6827349" y="3886200"/>
+            <a:ext cx="4632844" cy="822960"/>
           </a:xfrm>
           <a:prstGeom prst="rect">
             <a:avLst/>
@@ -6703,9 +7266,9 @@
               </a:lnSpc>
             </a:pPr>
             <a:r>
-              <a:rPr sz="1700" b="0" i="1">
+              <a:rPr sz="1700" b="0" i="0">
                 <a:solidFill>
-                  <a:srgbClr val="59472C"/>
+                  <a:srgbClr val="FFFFFF"/>
                 </a:solidFill>
               </a:rPr>
               <a:t>끝까지 들어 주셔서 고맙습니다</a:t>
@@ -6715,14 +7278,14 @@
       </p:sp>
       <p:sp>
         <p:nvSpPr>
-          <p:cNvPr id="5" name="안내 문구"/>
+          <p:cNvPr id="7" name="안내 문구"/>
           <p:cNvSpPr txBox="1"/>
           <p:nvPr/>
         </p:nvSpPr>
         <p:spPr>
           <a:xfrm>
-            <a:off x="853418" y="4617720"/>
-            <a:ext cx="6095847" cy="914400"/>
+            <a:off x="6827349" y="4754880"/>
+            <a:ext cx="4632844" cy="914400"/>
           </a:xfrm>
           <a:prstGeom prst="rect">
             <a:avLst/>
@@ -6743,7 +7306,7 @@
             <a:r>
               <a:rPr sz="1400" b="0" i="0">
                 <a:solidFill>
-                  <a:srgbClr val="666666"/>
+                  <a:srgbClr val="FFFFFF"/>
                 </a:solidFill>
               </a:rPr>
               <a:t>문의 · 연락처를 입력하세요</a:t>
@@ -6770,34 +7333,34 @@
         <a:sysClr val="window" lastClr="FFFFFF"/>
       </a:lt1>
       <a:dk2>
-        <a:srgbClr val="59472C"/>
+        <a:srgbClr val="493B27"/>
       </a:dk2>
       <a:lt2>
-        <a:srgbClr val="F8F5F1"/>
+        <a:srgbClr val="FBF5EC"/>
       </a:lt2>
       <a:accent1>
-        <a:srgbClr val="9D7D4D"/>
+        <a:srgbClr val="D8B279"/>
       </a:accent1>
       <a:accent2>
-        <a:srgbClr val="438289"/>
+        <a:srgbClr val="DCE198"/>
       </a:accent2>
       <a:accent3>
-        <a:srgbClr val="59472C"/>
+        <a:srgbClr val="493B27"/>
       </a:accent3>
       <a:accent4>
-        <a:srgbClr val="ECE3D4"/>
+        <a:srgbClr val="F6E9D5"/>
       </a:accent4>
       <a:accent5>
-        <a:srgbClr val="70806B"/>
+        <a:srgbClr val="DACA88"/>
       </a:accent5>
       <a:accent6>
-        <a:srgbClr val="9B9180"/>
+        <a:srgbClr val="92897D"/>
       </a:accent6>
       <a:hlink>
-        <a:srgbClr val="9D7D4D"/>
+        <a:srgbClr val="D8B279"/>
       </a:hlink>
       <a:folHlink>
-        <a:srgbClr val="59472C"/>
+        <a:srgbClr val="493B27"/>
       </a:folHlink>
     </a:clrScheme>
     <a:fontScheme name="Office">
